--- a/docs/pptx/carbo/ritu-carbo-linsubhr-ratio-anyhosp.pptx
+++ b/docs/pptx/carbo/ritu-carbo-linsubhr-ratio-anyhosp.pptx
@@ -2443,7 +2443,7 @@
           </p:nvSpPr>
           <p:spPr>
             <a:xfrm>
-              <a:off x="1427870" y="2073503"/>
+              <a:off x="1428538" y="2073503"/>
               <a:ext cx="0" cy="3649639"/>
             </a:xfrm>
             <a:custGeom>
@@ -2486,7 +2486,7 @@
           </p:nvSpPr>
           <p:spPr>
             <a:xfrm>
-              <a:off x="3243537" y="2073503"/>
+              <a:off x="3243764" y="2073503"/>
               <a:ext cx="0" cy="3649639"/>
             </a:xfrm>
             <a:custGeom>
@@ -2529,7 +2529,7 @@
           </p:nvSpPr>
           <p:spPr>
             <a:xfrm>
-              <a:off x="5059204" y="2073503"/>
+              <a:off x="5058989" y="2073503"/>
               <a:ext cx="0" cy="3649639"/>
             </a:xfrm>
             <a:custGeom>
@@ -2572,7 +2572,7 @@
           </p:nvSpPr>
           <p:spPr>
             <a:xfrm>
-              <a:off x="6874870" y="2073503"/>
+              <a:off x="6874214" y="2073503"/>
               <a:ext cx="0" cy="3649639"/>
             </a:xfrm>
             <a:custGeom>
@@ -2830,7 +2830,7 @@
           </p:nvSpPr>
           <p:spPr>
             <a:xfrm>
-              <a:off x="2335703" y="2073503"/>
+              <a:off x="2336151" y="2073503"/>
               <a:ext cx="0" cy="3649639"/>
             </a:xfrm>
             <a:custGeom>
@@ -2873,7 +2873,7 @@
           </p:nvSpPr>
           <p:spPr>
             <a:xfrm>
-              <a:off x="4151370" y="2073503"/>
+              <a:off x="4151376" y="2073503"/>
               <a:ext cx="0" cy="3649639"/>
             </a:xfrm>
             <a:custGeom>
@@ -2916,7 +2916,7 @@
           </p:nvSpPr>
           <p:spPr>
             <a:xfrm>
-              <a:off x="5967037" y="2073503"/>
+              <a:off x="5966601" y="2073503"/>
               <a:ext cx="0" cy="3649639"/>
             </a:xfrm>
             <a:custGeom>
@@ -2959,7 +2959,7 @@
           </p:nvSpPr>
           <p:spPr>
             <a:xfrm>
-              <a:off x="7782704" y="2073503"/>
+              <a:off x="7781826" y="2073503"/>
               <a:ext cx="0" cy="3649639"/>
             </a:xfrm>
             <a:custGeom>
@@ -3003,578 +3003,578 @@
           <p:spPr>
             <a:xfrm>
               <a:off x="1172049" y="2073503"/>
-              <a:ext cx="7090630" cy="3417267"/>
+              <a:ext cx="7090630" cy="3416926"/>
             </a:xfrm>
             <a:custGeom>
               <a:avLst/>
               <a:pathLst>
-                <a:path w="7090630" h="3417267">
+                <a:path w="7090630" h="3416926">
                   <a:moveTo>
-                    <a:pt x="803466" y="0"/>
+                    <a:pt x="837141" y="0"/>
                   </a:moveTo>
                   <a:lnTo>
-                    <a:pt x="859470" y="121286"/>
-                  </a:lnTo>
-                  <a:lnTo>
-                    <a:pt x="931092" y="269558"/>
-                  </a:lnTo>
-                  <a:lnTo>
-                    <a:pt x="1002715" y="411292"/>
-                  </a:lnTo>
-                  <a:lnTo>
-                    <a:pt x="1074337" y="546776"/>
-                  </a:lnTo>
-                  <a:lnTo>
-                    <a:pt x="1145960" y="676286"/>
-                  </a:lnTo>
-                  <a:lnTo>
-                    <a:pt x="1217582" y="800084"/>
-                  </a:lnTo>
-                  <a:lnTo>
-                    <a:pt x="1289205" y="918424"/>
-                  </a:lnTo>
-                  <a:lnTo>
-                    <a:pt x="1360827" y="1031545"/>
-                  </a:lnTo>
-                  <a:lnTo>
-                    <a:pt x="1432450" y="1139678"/>
-                  </a:lnTo>
-                  <a:lnTo>
-                    <a:pt x="1504073" y="1243043"/>
-                  </a:lnTo>
-                  <a:lnTo>
-                    <a:pt x="1575695" y="1341849"/>
-                  </a:lnTo>
-                  <a:lnTo>
-                    <a:pt x="1647318" y="1436299"/>
-                  </a:lnTo>
-                  <a:lnTo>
-                    <a:pt x="1718940" y="1526584"/>
-                  </a:lnTo>
-                  <a:lnTo>
-                    <a:pt x="1790563" y="1612887"/>
-                  </a:lnTo>
-                  <a:lnTo>
-                    <a:pt x="1862185" y="1695385"/>
-                  </a:lnTo>
-                  <a:lnTo>
-                    <a:pt x="1933808" y="1774245"/>
-                  </a:lnTo>
-                  <a:lnTo>
-                    <a:pt x="2005430" y="1849628"/>
-                  </a:lnTo>
-                  <a:lnTo>
-                    <a:pt x="2077053" y="1921687"/>
-                  </a:lnTo>
-                  <a:lnTo>
-                    <a:pt x="2148675" y="1990568"/>
-                  </a:lnTo>
-                  <a:lnTo>
-                    <a:pt x="2220298" y="2056411"/>
-                  </a:lnTo>
-                  <a:lnTo>
-                    <a:pt x="2291920" y="2119351"/>
-                  </a:lnTo>
-                  <a:lnTo>
-                    <a:pt x="2363543" y="2179516"/>
-                  </a:lnTo>
-                  <a:lnTo>
-                    <a:pt x="2435165" y="2237028"/>
-                  </a:lnTo>
-                  <a:lnTo>
-                    <a:pt x="2506788" y="2292003"/>
-                  </a:lnTo>
-                  <a:lnTo>
-                    <a:pt x="2578410" y="2344555"/>
-                  </a:lnTo>
-                  <a:lnTo>
-                    <a:pt x="2650033" y="2394789"/>
-                  </a:lnTo>
-                  <a:lnTo>
-                    <a:pt x="2721655" y="2442808"/>
-                  </a:lnTo>
-                  <a:lnTo>
-                    <a:pt x="2793278" y="2488710"/>
-                  </a:lnTo>
-                  <a:lnTo>
-                    <a:pt x="2864901" y="2532587"/>
-                  </a:lnTo>
-                  <a:lnTo>
-                    <a:pt x="2936523" y="2574530"/>
-                  </a:lnTo>
-                  <a:lnTo>
-                    <a:pt x="3008146" y="2614623"/>
-                  </a:lnTo>
-                  <a:lnTo>
-                    <a:pt x="3079768" y="2652948"/>
-                  </a:lnTo>
-                  <a:lnTo>
-                    <a:pt x="3151391" y="2649200"/>
-                  </a:lnTo>
-                  <a:lnTo>
-                    <a:pt x="3223013" y="2643897"/>
-                  </a:lnTo>
-                  <a:lnTo>
-                    <a:pt x="3294636" y="2638559"/>
-                  </a:lnTo>
-                  <a:lnTo>
-                    <a:pt x="3366258" y="2633188"/>
-                  </a:lnTo>
-                  <a:lnTo>
-                    <a:pt x="3437881" y="2627783"/>
-                  </a:lnTo>
-                  <a:lnTo>
-                    <a:pt x="3509503" y="2622343"/>
-                  </a:lnTo>
-                  <a:lnTo>
-                    <a:pt x="3581126" y="2616869"/>
-                  </a:lnTo>
-                  <a:lnTo>
-                    <a:pt x="3652748" y="2611360"/>
-                  </a:lnTo>
-                  <a:lnTo>
-                    <a:pt x="3724371" y="2605816"/>
-                  </a:lnTo>
-                  <a:lnTo>
-                    <a:pt x="3795993" y="2600237"/>
-                  </a:lnTo>
-                  <a:lnTo>
-                    <a:pt x="3867616" y="2594622"/>
-                  </a:lnTo>
-                  <a:lnTo>
-                    <a:pt x="3939238" y="2588972"/>
-                  </a:lnTo>
-                  <a:lnTo>
-                    <a:pt x="4010861" y="2583286"/>
-                  </a:lnTo>
-                  <a:lnTo>
-                    <a:pt x="4082483" y="2577563"/>
-                  </a:lnTo>
-                  <a:lnTo>
-                    <a:pt x="4154106" y="2571805"/>
-                  </a:lnTo>
-                  <a:lnTo>
-                    <a:pt x="4225729" y="2566009"/>
-                  </a:lnTo>
-                  <a:lnTo>
-                    <a:pt x="4297351" y="2560177"/>
-                  </a:lnTo>
-                  <a:lnTo>
-                    <a:pt x="4368974" y="2554308"/>
-                  </a:lnTo>
-                  <a:lnTo>
-                    <a:pt x="4440596" y="2548401"/>
-                  </a:lnTo>
-                  <a:lnTo>
-                    <a:pt x="4512219" y="2542457"/>
-                  </a:lnTo>
-                  <a:lnTo>
-                    <a:pt x="4583841" y="2536475"/>
-                  </a:lnTo>
-                  <a:lnTo>
-                    <a:pt x="4655464" y="2530456"/>
-                  </a:lnTo>
-                  <a:lnTo>
-                    <a:pt x="4727086" y="2524397"/>
-                  </a:lnTo>
-                  <a:lnTo>
-                    <a:pt x="4798709" y="2518301"/>
-                  </a:lnTo>
-                  <a:lnTo>
-                    <a:pt x="4870331" y="2512166"/>
-                  </a:lnTo>
-                  <a:lnTo>
-                    <a:pt x="4941954" y="2505991"/>
-                  </a:lnTo>
-                  <a:lnTo>
-                    <a:pt x="5013576" y="2499778"/>
-                  </a:lnTo>
-                  <a:lnTo>
-                    <a:pt x="5085199" y="2493524"/>
-                  </a:lnTo>
-                  <a:lnTo>
-                    <a:pt x="5156821" y="2487232"/>
-                  </a:lnTo>
-                  <a:lnTo>
-                    <a:pt x="5228444" y="2480899"/>
-                  </a:lnTo>
-                  <a:lnTo>
-                    <a:pt x="5300066" y="2474526"/>
-                  </a:lnTo>
-                  <a:lnTo>
-                    <a:pt x="5371689" y="2468112"/>
-                  </a:lnTo>
-                  <a:lnTo>
-                    <a:pt x="5443311" y="2461658"/>
-                  </a:lnTo>
-                  <a:lnTo>
-                    <a:pt x="5514934" y="2455163"/>
-                  </a:lnTo>
-                  <a:lnTo>
-                    <a:pt x="5586557" y="2448626"/>
-                  </a:lnTo>
-                  <a:lnTo>
-                    <a:pt x="5658179" y="2442048"/>
-                  </a:lnTo>
-                  <a:lnTo>
-                    <a:pt x="5729802" y="2435428"/>
-                  </a:lnTo>
-                  <a:lnTo>
-                    <a:pt x="5801424" y="2428766"/>
-                  </a:lnTo>
-                  <a:lnTo>
-                    <a:pt x="5873047" y="2422062"/>
-                  </a:lnTo>
-                  <a:lnTo>
-                    <a:pt x="5944669" y="2415315"/>
-                  </a:lnTo>
-                  <a:lnTo>
-                    <a:pt x="6016292" y="2408525"/>
-                  </a:lnTo>
-                  <a:lnTo>
-                    <a:pt x="6087914" y="2401692"/>
-                  </a:lnTo>
-                  <a:lnTo>
-                    <a:pt x="6159537" y="2394815"/>
-                  </a:lnTo>
-                  <a:lnTo>
-                    <a:pt x="6231159" y="2387895"/>
-                  </a:lnTo>
-                  <a:lnTo>
-                    <a:pt x="6302782" y="2380931"/>
-                  </a:lnTo>
-                  <a:lnTo>
-                    <a:pt x="6374404" y="2373923"/>
-                  </a:lnTo>
-                  <a:lnTo>
-                    <a:pt x="6446027" y="2366870"/>
-                  </a:lnTo>
-                  <a:lnTo>
-                    <a:pt x="6517649" y="2359772"/>
-                  </a:lnTo>
-                  <a:lnTo>
-                    <a:pt x="6589272" y="2352629"/>
-                  </a:lnTo>
-                  <a:lnTo>
-                    <a:pt x="6660894" y="2345441"/>
-                  </a:lnTo>
-                  <a:lnTo>
-                    <a:pt x="6732517" y="2338207"/>
-                  </a:lnTo>
-                  <a:lnTo>
-                    <a:pt x="6804139" y="2330927"/>
-                  </a:lnTo>
-                  <a:lnTo>
-                    <a:pt x="6875762" y="2323601"/>
-                  </a:lnTo>
-                  <a:lnTo>
-                    <a:pt x="6947385" y="2316229"/>
-                  </a:lnTo>
-                  <a:lnTo>
-                    <a:pt x="7019007" y="2308809"/>
-                  </a:lnTo>
-                  <a:lnTo>
-                    <a:pt x="7090630" y="2301342"/>
-                  </a:lnTo>
-                  <a:lnTo>
-                    <a:pt x="7090630" y="3417267"/>
-                  </a:lnTo>
-                  <a:lnTo>
-                    <a:pt x="7019007" y="3414200"/>
-                  </a:lnTo>
-                  <a:lnTo>
-                    <a:pt x="6947385" y="3410992"/>
-                  </a:lnTo>
-                  <a:lnTo>
-                    <a:pt x="6875762" y="3407636"/>
-                  </a:lnTo>
-                  <a:lnTo>
-                    <a:pt x="6804139" y="3404125"/>
-                  </a:lnTo>
-                  <a:lnTo>
-                    <a:pt x="6732517" y="3400452"/>
-                  </a:lnTo>
-                  <a:lnTo>
-                    <a:pt x="6660894" y="3396609"/>
-                  </a:lnTo>
-                  <a:lnTo>
-                    <a:pt x="6589272" y="3392590"/>
-                  </a:lnTo>
-                  <a:lnTo>
-                    <a:pt x="6517649" y="3388384"/>
-                  </a:lnTo>
-                  <a:lnTo>
-                    <a:pt x="6446027" y="3383985"/>
-                  </a:lnTo>
-                  <a:lnTo>
-                    <a:pt x="6374404" y="3379383"/>
-                  </a:lnTo>
-                  <a:lnTo>
-                    <a:pt x="6302782" y="3374569"/>
-                  </a:lnTo>
-                  <a:lnTo>
-                    <a:pt x="6231159" y="3369533"/>
-                  </a:lnTo>
-                  <a:lnTo>
-                    <a:pt x="6159537" y="3364264"/>
-                  </a:lnTo>
-                  <a:lnTo>
-                    <a:pt x="6087914" y="3358752"/>
-                  </a:lnTo>
-                  <a:lnTo>
-                    <a:pt x="6016292" y="3352986"/>
-                  </a:lnTo>
-                  <a:lnTo>
-                    <a:pt x="5944669" y="3346954"/>
-                  </a:lnTo>
-                  <a:lnTo>
-                    <a:pt x="5873047" y="3340644"/>
-                  </a:lnTo>
-                  <a:lnTo>
-                    <a:pt x="5801424" y="3334042"/>
-                  </a:lnTo>
-                  <a:lnTo>
-                    <a:pt x="5729802" y="3327136"/>
-                  </a:lnTo>
-                  <a:lnTo>
-                    <a:pt x="5658179" y="3319912"/>
-                  </a:lnTo>
-                  <a:lnTo>
-                    <a:pt x="5586557" y="3312354"/>
-                  </a:lnTo>
-                  <a:lnTo>
-                    <a:pt x="5514934" y="3304448"/>
-                  </a:lnTo>
-                  <a:lnTo>
-                    <a:pt x="5443311" y="3296177"/>
-                  </a:lnTo>
-                  <a:lnTo>
-                    <a:pt x="5371689" y="3287524"/>
-                  </a:lnTo>
-                  <a:lnTo>
-                    <a:pt x="5300066" y="3278472"/>
-                  </a:lnTo>
-                  <a:lnTo>
-                    <a:pt x="5228444" y="3269003"/>
-                  </a:lnTo>
-                  <a:lnTo>
-                    <a:pt x="5156821" y="3259097"/>
-                  </a:lnTo>
-                  <a:lnTo>
-                    <a:pt x="5085199" y="3248733"/>
-                  </a:lnTo>
-                  <a:lnTo>
-                    <a:pt x="5013576" y="3237892"/>
-                  </a:lnTo>
-                  <a:lnTo>
-                    <a:pt x="4941954" y="3226551"/>
-                  </a:lnTo>
-                  <a:lnTo>
-                    <a:pt x="4870331" y="3214686"/>
-                  </a:lnTo>
-                  <a:lnTo>
-                    <a:pt x="4798709" y="3202274"/>
-                  </a:lnTo>
-                  <a:lnTo>
-                    <a:pt x="4727086" y="3189290"/>
-                  </a:lnTo>
-                  <a:lnTo>
-                    <a:pt x="4655464" y="3175706"/>
-                  </a:lnTo>
-                  <a:lnTo>
-                    <a:pt x="4583841" y="3161496"/>
-                  </a:lnTo>
-                  <a:lnTo>
-                    <a:pt x="4512219" y="3146631"/>
-                  </a:lnTo>
-                  <a:lnTo>
-                    <a:pt x="4440596" y="3131080"/>
-                  </a:lnTo>
-                  <a:lnTo>
-                    <a:pt x="4368974" y="3114811"/>
-                  </a:lnTo>
-                  <a:lnTo>
-                    <a:pt x="4297351" y="3097792"/>
-                  </a:lnTo>
-                  <a:lnTo>
-                    <a:pt x="4225729" y="3079987"/>
-                  </a:lnTo>
-                  <a:lnTo>
-                    <a:pt x="4154106" y="3061362"/>
-                  </a:lnTo>
-                  <a:lnTo>
-                    <a:pt x="4082483" y="3041877"/>
-                  </a:lnTo>
-                  <a:lnTo>
-                    <a:pt x="4010861" y="3021493"/>
-                  </a:lnTo>
-                  <a:lnTo>
-                    <a:pt x="3939238" y="3000169"/>
-                  </a:lnTo>
-                  <a:lnTo>
-                    <a:pt x="3867616" y="2977862"/>
-                  </a:lnTo>
-                  <a:lnTo>
-                    <a:pt x="3795993" y="2954525"/>
-                  </a:lnTo>
-                  <a:lnTo>
-                    <a:pt x="3724371" y="2930112"/>
-                  </a:lnTo>
-                  <a:lnTo>
-                    <a:pt x="3652748" y="2904573"/>
-                  </a:lnTo>
-                  <a:lnTo>
-                    <a:pt x="3581126" y="2877855"/>
-                  </a:lnTo>
-                  <a:lnTo>
-                    <a:pt x="3509503" y="2849905"/>
-                  </a:lnTo>
-                  <a:lnTo>
-                    <a:pt x="3437881" y="2820665"/>
-                  </a:lnTo>
-                  <a:lnTo>
-                    <a:pt x="3366258" y="2790077"/>
-                  </a:lnTo>
-                  <a:lnTo>
-                    <a:pt x="3294636" y="2758078"/>
-                  </a:lnTo>
-                  <a:lnTo>
-                    <a:pt x="3223013" y="2724603"/>
-                  </a:lnTo>
-                  <a:lnTo>
-                    <a:pt x="3151391" y="2689583"/>
-                  </a:lnTo>
-                  <a:lnTo>
-                    <a:pt x="3079768" y="2654470"/>
-                  </a:lnTo>
-                  <a:lnTo>
-                    <a:pt x="3008146" y="2659707"/>
-                  </a:lnTo>
-                  <a:lnTo>
-                    <a:pt x="2936523" y="2664911"/>
-                  </a:lnTo>
-                  <a:lnTo>
-                    <a:pt x="2864901" y="2670081"/>
-                  </a:lnTo>
-                  <a:lnTo>
-                    <a:pt x="2793278" y="2675220"/>
-                  </a:lnTo>
-                  <a:lnTo>
-                    <a:pt x="2721655" y="2680325"/>
-                  </a:lnTo>
-                  <a:lnTo>
-                    <a:pt x="2650033" y="2685399"/>
-                  </a:lnTo>
-                  <a:lnTo>
-                    <a:pt x="2578410" y="2690440"/>
-                  </a:lnTo>
-                  <a:lnTo>
-                    <a:pt x="2506788" y="2695450"/>
-                  </a:lnTo>
-                  <a:lnTo>
-                    <a:pt x="2435165" y="2700428"/>
-                  </a:lnTo>
-                  <a:lnTo>
-                    <a:pt x="2363543" y="2705374"/>
-                  </a:lnTo>
-                  <a:lnTo>
-                    <a:pt x="2291920" y="2710290"/>
-                  </a:lnTo>
-                  <a:lnTo>
-                    <a:pt x="2220298" y="2715174"/>
-                  </a:lnTo>
-                  <a:lnTo>
-                    <a:pt x="2148675" y="2720027"/>
-                  </a:lnTo>
-                  <a:lnTo>
-                    <a:pt x="2077053" y="2724850"/>
-                  </a:lnTo>
-                  <a:lnTo>
-                    <a:pt x="2005430" y="2729642"/>
-                  </a:lnTo>
-                  <a:lnTo>
-                    <a:pt x="1933808" y="2734404"/>
-                  </a:lnTo>
-                  <a:lnTo>
-                    <a:pt x="1862185" y="2739136"/>
-                  </a:lnTo>
-                  <a:lnTo>
-                    <a:pt x="1790563" y="2743838"/>
-                  </a:lnTo>
-                  <a:lnTo>
-                    <a:pt x="1718940" y="2748511"/>
-                  </a:lnTo>
-                  <a:lnTo>
-                    <a:pt x="1647318" y="2753154"/>
-                  </a:lnTo>
-                  <a:lnTo>
-                    <a:pt x="1575695" y="2757767"/>
-                  </a:lnTo>
-                  <a:lnTo>
-                    <a:pt x="1504073" y="2762352"/>
-                  </a:lnTo>
-                  <a:lnTo>
-                    <a:pt x="1432450" y="2766907"/>
-                  </a:lnTo>
-                  <a:lnTo>
-                    <a:pt x="1360827" y="2771434"/>
-                  </a:lnTo>
-                  <a:lnTo>
-                    <a:pt x="1289205" y="2775932"/>
-                  </a:lnTo>
-                  <a:lnTo>
-                    <a:pt x="1217582" y="2780402"/>
-                  </a:lnTo>
-                  <a:lnTo>
-                    <a:pt x="1145960" y="2784843"/>
-                  </a:lnTo>
-                  <a:lnTo>
-                    <a:pt x="1074337" y="2789257"/>
-                  </a:lnTo>
-                  <a:lnTo>
-                    <a:pt x="1002715" y="2793642"/>
-                  </a:lnTo>
-                  <a:lnTo>
-                    <a:pt x="931092" y="2798000"/>
-                  </a:lnTo>
-                  <a:lnTo>
-                    <a:pt x="859470" y="2802330"/>
-                  </a:lnTo>
-                  <a:lnTo>
-                    <a:pt x="787847" y="2806634"/>
-                  </a:lnTo>
-                  <a:lnTo>
-                    <a:pt x="716225" y="2810909"/>
-                  </a:lnTo>
-                  <a:lnTo>
-                    <a:pt x="644602" y="2815158"/>
-                  </a:lnTo>
-                  <a:lnTo>
-                    <a:pt x="572980" y="2819380"/>
-                  </a:lnTo>
-                  <a:lnTo>
-                    <a:pt x="501357" y="2823576"/>
-                  </a:lnTo>
-                  <a:lnTo>
-                    <a:pt x="429735" y="2827744"/>
-                  </a:lnTo>
-                  <a:lnTo>
-                    <a:pt x="358112" y="2831887"/>
-                  </a:lnTo>
-                  <a:lnTo>
-                    <a:pt x="286490" y="2836003"/>
-                  </a:lnTo>
-                  <a:lnTo>
-                    <a:pt x="214867" y="2840094"/>
-                  </a:lnTo>
-                  <a:lnTo>
-                    <a:pt x="143245" y="2844158"/>
-                  </a:lnTo>
-                  <a:lnTo>
-                    <a:pt x="71622" y="2848197"/>
-                  </a:lnTo>
-                  <a:lnTo>
-                    <a:pt x="0" y="2852211"/>
+                    <a:pt x="859470" y="49594"/>
+                  </a:lnTo>
+                  <a:lnTo>
+                    <a:pt x="931092" y="201630"/>
+                  </a:lnTo>
+                  <a:lnTo>
+                    <a:pt x="1002715" y="346936"/>
+                  </a:lnTo>
+                  <a:lnTo>
+                    <a:pt x="1074337" y="485808"/>
+                  </a:lnTo>
+                  <a:lnTo>
+                    <a:pt x="1145960" y="618533"/>
+                  </a:lnTo>
+                  <a:lnTo>
+                    <a:pt x="1217582" y="745381"/>
+                  </a:lnTo>
+                  <a:lnTo>
+                    <a:pt x="1289205" y="866614"/>
+                  </a:lnTo>
+                  <a:lnTo>
+                    <a:pt x="1360827" y="982479"/>
+                  </a:lnTo>
+                  <a:lnTo>
+                    <a:pt x="1432450" y="1093215"/>
+                  </a:lnTo>
+                  <a:lnTo>
+                    <a:pt x="1504073" y="1199048"/>
+                  </a:lnTo>
+                  <a:lnTo>
+                    <a:pt x="1575695" y="1300196"/>
+                  </a:lnTo>
+                  <a:lnTo>
+                    <a:pt x="1647318" y="1396866"/>
+                  </a:lnTo>
+                  <a:lnTo>
+                    <a:pt x="1718940" y="1489256"/>
+                  </a:lnTo>
+                  <a:lnTo>
+                    <a:pt x="1790563" y="1577556"/>
+                  </a:lnTo>
+                  <a:lnTo>
+                    <a:pt x="1862185" y="1661947"/>
+                  </a:lnTo>
+                  <a:lnTo>
+                    <a:pt x="1933808" y="1742601"/>
+                  </a:lnTo>
+                  <a:lnTo>
+                    <a:pt x="2005430" y="1819685"/>
+                  </a:lnTo>
+                  <a:lnTo>
+                    <a:pt x="2077053" y="1893356"/>
+                  </a:lnTo>
+                  <a:lnTo>
+                    <a:pt x="2148675" y="1963766"/>
+                  </a:lnTo>
+                  <a:lnTo>
+                    <a:pt x="2220298" y="2031058"/>
+                  </a:lnTo>
+                  <a:lnTo>
+                    <a:pt x="2291920" y="2095372"/>
+                  </a:lnTo>
+                  <a:lnTo>
+                    <a:pt x="2363543" y="2156838"/>
+                  </a:lnTo>
+                  <a:lnTo>
+                    <a:pt x="2435165" y="2215582"/>
+                  </a:lnTo>
+                  <a:lnTo>
+                    <a:pt x="2506788" y="2271726"/>
+                  </a:lnTo>
+                  <a:lnTo>
+                    <a:pt x="2578410" y="2325385"/>
+                  </a:lnTo>
+                  <a:lnTo>
+                    <a:pt x="2650033" y="2376668"/>
+                  </a:lnTo>
+                  <a:lnTo>
+                    <a:pt x="2721655" y="2425680"/>
+                  </a:lnTo>
+                  <a:lnTo>
+                    <a:pt x="2793278" y="2472523"/>
+                  </a:lnTo>
+                  <a:lnTo>
+                    <a:pt x="2864901" y="2517292"/>
+                  </a:lnTo>
+                  <a:lnTo>
+                    <a:pt x="2936523" y="2560078"/>
+                  </a:lnTo>
+                  <a:lnTo>
+                    <a:pt x="3008146" y="2600971"/>
+                  </a:lnTo>
+                  <a:lnTo>
+                    <a:pt x="3079768" y="2640053"/>
+                  </a:lnTo>
+                  <a:lnTo>
+                    <a:pt x="3151391" y="2651041"/>
+                  </a:lnTo>
+                  <a:lnTo>
+                    <a:pt x="3223013" y="2645823"/>
+                  </a:lnTo>
+                  <a:lnTo>
+                    <a:pt x="3294636" y="2640572"/>
+                  </a:lnTo>
+                  <a:lnTo>
+                    <a:pt x="3366258" y="2635288"/>
+                  </a:lnTo>
+                  <a:lnTo>
+                    <a:pt x="3437881" y="2629971"/>
+                  </a:lnTo>
+                  <a:lnTo>
+                    <a:pt x="3509503" y="2624621"/>
+                  </a:lnTo>
+                  <a:lnTo>
+                    <a:pt x="3581126" y="2619237"/>
+                  </a:lnTo>
+                  <a:lnTo>
+                    <a:pt x="3652748" y="2613819"/>
+                  </a:lnTo>
+                  <a:lnTo>
+                    <a:pt x="3724371" y="2608368"/>
+                  </a:lnTo>
+                  <a:lnTo>
+                    <a:pt x="3795993" y="2602882"/>
+                  </a:lnTo>
+                  <a:lnTo>
+                    <a:pt x="3867616" y="2597362"/>
+                  </a:lnTo>
+                  <a:lnTo>
+                    <a:pt x="3939238" y="2591807"/>
+                  </a:lnTo>
+                  <a:lnTo>
+                    <a:pt x="4010861" y="2586218"/>
+                  </a:lnTo>
+                  <a:lnTo>
+                    <a:pt x="4082483" y="2580593"/>
+                  </a:lnTo>
+                  <a:lnTo>
+                    <a:pt x="4154106" y="2574934"/>
+                  </a:lnTo>
+                  <a:lnTo>
+                    <a:pt x="4225729" y="2569238"/>
+                  </a:lnTo>
+                  <a:lnTo>
+                    <a:pt x="4297351" y="2563507"/>
+                  </a:lnTo>
+                  <a:lnTo>
+                    <a:pt x="4368974" y="2557741"/>
+                  </a:lnTo>
+                  <a:lnTo>
+                    <a:pt x="4440596" y="2551938"/>
+                  </a:lnTo>
+                  <a:lnTo>
+                    <a:pt x="4512219" y="2546098"/>
+                  </a:lnTo>
+                  <a:lnTo>
+                    <a:pt x="4583841" y="2540222"/>
+                  </a:lnTo>
+                  <a:lnTo>
+                    <a:pt x="4655464" y="2534310"/>
+                  </a:lnTo>
+                  <a:lnTo>
+                    <a:pt x="4727086" y="2528360"/>
+                  </a:lnTo>
+                  <a:lnTo>
+                    <a:pt x="4798709" y="2522373"/>
+                  </a:lnTo>
+                  <a:lnTo>
+                    <a:pt x="4870331" y="2516348"/>
+                  </a:lnTo>
+                  <a:lnTo>
+                    <a:pt x="4941954" y="2510286"/>
+                  </a:lnTo>
+                  <a:lnTo>
+                    <a:pt x="5013576" y="2504185"/>
+                  </a:lnTo>
+                  <a:lnTo>
+                    <a:pt x="5085199" y="2498047"/>
+                  </a:lnTo>
+                  <a:lnTo>
+                    <a:pt x="5156821" y="2491870"/>
+                  </a:lnTo>
+                  <a:lnTo>
+                    <a:pt x="5228444" y="2485654"/>
+                  </a:lnTo>
+                  <a:lnTo>
+                    <a:pt x="5300066" y="2479399"/>
+                  </a:lnTo>
+                  <a:lnTo>
+                    <a:pt x="5371689" y="2473105"/>
+                  </a:lnTo>
+                  <a:lnTo>
+                    <a:pt x="5443311" y="2466772"/>
+                  </a:lnTo>
+                  <a:lnTo>
+                    <a:pt x="5514934" y="2460399"/>
+                  </a:lnTo>
+                  <a:lnTo>
+                    <a:pt x="5586557" y="2453986"/>
+                  </a:lnTo>
+                  <a:lnTo>
+                    <a:pt x="5658179" y="2447533"/>
+                  </a:lnTo>
+                  <a:lnTo>
+                    <a:pt x="5729802" y="2441039"/>
+                  </a:lnTo>
+                  <a:lnTo>
+                    <a:pt x="5801424" y="2434505"/>
+                  </a:lnTo>
+                  <a:lnTo>
+                    <a:pt x="5873047" y="2427930"/>
+                  </a:lnTo>
+                  <a:lnTo>
+                    <a:pt x="5944669" y="2421313"/>
+                  </a:lnTo>
+                  <a:lnTo>
+                    <a:pt x="6016292" y="2414655"/>
+                  </a:lnTo>
+                  <a:lnTo>
+                    <a:pt x="6087914" y="2407956"/>
+                  </a:lnTo>
+                  <a:lnTo>
+                    <a:pt x="6159537" y="2401214"/>
+                  </a:lnTo>
+                  <a:lnTo>
+                    <a:pt x="6231159" y="2394430"/>
+                  </a:lnTo>
+                  <a:lnTo>
+                    <a:pt x="6302782" y="2387604"/>
+                  </a:lnTo>
+                  <a:lnTo>
+                    <a:pt x="6374404" y="2380735"/>
+                  </a:lnTo>
+                  <a:lnTo>
+                    <a:pt x="6446027" y="2373823"/>
+                  </a:lnTo>
+                  <a:lnTo>
+                    <a:pt x="6517649" y="2366867"/>
+                  </a:lnTo>
+                  <a:lnTo>
+                    <a:pt x="6589272" y="2359868"/>
+                  </a:lnTo>
+                  <a:lnTo>
+                    <a:pt x="6660894" y="2352825"/>
+                  </a:lnTo>
+                  <a:lnTo>
+                    <a:pt x="6732517" y="2345738"/>
+                  </a:lnTo>
+                  <a:lnTo>
+                    <a:pt x="6804139" y="2338606"/>
+                  </a:lnTo>
+                  <a:lnTo>
+                    <a:pt x="6875762" y="2331430"/>
+                  </a:lnTo>
+                  <a:lnTo>
+                    <a:pt x="6947385" y="2324209"/>
+                  </a:lnTo>
+                  <a:lnTo>
+                    <a:pt x="7019007" y="2316942"/>
+                  </a:lnTo>
+                  <a:lnTo>
+                    <a:pt x="7090630" y="2309630"/>
+                  </a:lnTo>
+                  <a:lnTo>
+                    <a:pt x="7090630" y="3416926"/>
+                  </a:lnTo>
+                  <a:lnTo>
+                    <a:pt x="7019007" y="3413831"/>
+                  </a:lnTo>
+                  <a:lnTo>
+                    <a:pt x="6947385" y="3410592"/>
+                  </a:lnTo>
+                  <a:lnTo>
+                    <a:pt x="6875762" y="3407203"/>
+                  </a:lnTo>
+                  <a:lnTo>
+                    <a:pt x="6804139" y="3403658"/>
+                  </a:lnTo>
+                  <a:lnTo>
+                    <a:pt x="6732517" y="3399948"/>
+                  </a:lnTo>
+                  <a:lnTo>
+                    <a:pt x="6660894" y="3396066"/>
+                  </a:lnTo>
+                  <a:lnTo>
+                    <a:pt x="6589272" y="3392004"/>
+                  </a:lnTo>
+                  <a:lnTo>
+                    <a:pt x="6517649" y="3387755"/>
+                  </a:lnTo>
+                  <a:lnTo>
+                    <a:pt x="6446027" y="3383308"/>
+                  </a:lnTo>
+                  <a:lnTo>
+                    <a:pt x="6374404" y="3378656"/>
+                  </a:lnTo>
+                  <a:lnTo>
+                    <a:pt x="6302782" y="3373787"/>
+                  </a:lnTo>
+                  <a:lnTo>
+                    <a:pt x="6231159" y="3368694"/>
+                  </a:lnTo>
+                  <a:lnTo>
+                    <a:pt x="6159537" y="3363364"/>
+                  </a:lnTo>
+                  <a:lnTo>
+                    <a:pt x="6087914" y="3357788"/>
+                  </a:lnTo>
+                  <a:lnTo>
+                    <a:pt x="6016292" y="3351953"/>
+                  </a:lnTo>
+                  <a:lnTo>
+                    <a:pt x="5944669" y="3345848"/>
+                  </a:lnTo>
+                  <a:lnTo>
+                    <a:pt x="5873047" y="3339460"/>
+                  </a:lnTo>
+                  <a:lnTo>
+                    <a:pt x="5801424" y="3332777"/>
+                  </a:lnTo>
+                  <a:lnTo>
+                    <a:pt x="5729802" y="3325783"/>
+                  </a:lnTo>
+                  <a:lnTo>
+                    <a:pt x="5658179" y="3318466"/>
+                  </a:lnTo>
+                  <a:lnTo>
+                    <a:pt x="5586557" y="3310810"/>
+                  </a:lnTo>
+                  <a:lnTo>
+                    <a:pt x="5514934" y="3302799"/>
+                  </a:lnTo>
+                  <a:lnTo>
+                    <a:pt x="5443311" y="3294417"/>
+                  </a:lnTo>
+                  <a:lnTo>
+                    <a:pt x="5371689" y="3285647"/>
+                  </a:lnTo>
+                  <a:lnTo>
+                    <a:pt x="5300066" y="3276470"/>
+                  </a:lnTo>
+                  <a:lnTo>
+                    <a:pt x="5228444" y="3266869"/>
+                  </a:lnTo>
+                  <a:lnTo>
+                    <a:pt x="5156821" y="3256822"/>
+                  </a:lnTo>
+                  <a:lnTo>
+                    <a:pt x="5085199" y="3246310"/>
+                  </a:lnTo>
+                  <a:lnTo>
+                    <a:pt x="5013576" y="3235312"/>
+                  </a:lnTo>
+                  <a:lnTo>
+                    <a:pt x="4941954" y="3223804"/>
+                  </a:lnTo>
+                  <a:lnTo>
+                    <a:pt x="4870331" y="3211762"/>
+                  </a:lnTo>
+                  <a:lnTo>
+                    <a:pt x="4798709" y="3199163"/>
+                  </a:lnTo>
+                  <a:lnTo>
+                    <a:pt x="4727086" y="3185981"/>
+                  </a:lnTo>
+                  <a:lnTo>
+                    <a:pt x="4655464" y="3172187"/>
+                  </a:lnTo>
+                  <a:lnTo>
+                    <a:pt x="4583841" y="3157755"/>
+                  </a:lnTo>
+                  <a:lnTo>
+                    <a:pt x="4512219" y="3142654"/>
+                  </a:lnTo>
+                  <a:lnTo>
+                    <a:pt x="4440596" y="3126854"/>
+                  </a:lnTo>
+                  <a:lnTo>
+                    <a:pt x="4368974" y="3110322"/>
+                  </a:lnTo>
+                  <a:lnTo>
+                    <a:pt x="4297351" y="3093024"/>
+                  </a:lnTo>
+                  <a:lnTo>
+                    <a:pt x="4225729" y="3074924"/>
+                  </a:lnTo>
+                  <a:lnTo>
+                    <a:pt x="4154106" y="3055987"/>
+                  </a:lnTo>
+                  <a:lnTo>
+                    <a:pt x="4082483" y="3036172"/>
+                  </a:lnTo>
+                  <a:lnTo>
+                    <a:pt x="4010861" y="3015439"/>
+                  </a:lnTo>
+                  <a:lnTo>
+                    <a:pt x="3939238" y="2993745"/>
+                  </a:lnTo>
+                  <a:lnTo>
+                    <a:pt x="3867616" y="2971047"/>
+                  </a:lnTo>
+                  <a:lnTo>
+                    <a:pt x="3795993" y="2947298"/>
+                  </a:lnTo>
+                  <a:lnTo>
+                    <a:pt x="3724371" y="2922448"/>
+                  </a:lnTo>
+                  <a:lnTo>
+                    <a:pt x="3652748" y="2896447"/>
+                  </a:lnTo>
+                  <a:lnTo>
+                    <a:pt x="3581126" y="2869242"/>
+                  </a:lnTo>
+                  <a:lnTo>
+                    <a:pt x="3509503" y="2840776"/>
+                  </a:lnTo>
+                  <a:lnTo>
+                    <a:pt x="3437881" y="2810992"/>
+                  </a:lnTo>
+                  <a:lnTo>
+                    <a:pt x="3366258" y="2779828"/>
+                  </a:lnTo>
+                  <a:lnTo>
+                    <a:pt x="3294636" y="2747221"/>
+                  </a:lnTo>
+                  <a:lnTo>
+                    <a:pt x="3223013" y="2713103"/>
+                  </a:lnTo>
+                  <a:lnTo>
+                    <a:pt x="3151391" y="2677405"/>
+                  </a:lnTo>
+                  <a:lnTo>
+                    <a:pt x="3079768" y="2656227"/>
+                  </a:lnTo>
+                  <a:lnTo>
+                    <a:pt x="3008146" y="2661381"/>
+                  </a:lnTo>
+                  <a:lnTo>
+                    <a:pt x="2936523" y="2666502"/>
+                  </a:lnTo>
+                  <a:lnTo>
+                    <a:pt x="2864901" y="2671591"/>
+                  </a:lnTo>
+                  <a:lnTo>
+                    <a:pt x="2793278" y="2676649"/>
+                  </a:lnTo>
+                  <a:lnTo>
+                    <a:pt x="2721655" y="2681676"/>
+                  </a:lnTo>
+                  <a:lnTo>
+                    <a:pt x="2650033" y="2686671"/>
+                  </a:lnTo>
+                  <a:lnTo>
+                    <a:pt x="2578410" y="2691635"/>
+                  </a:lnTo>
+                  <a:lnTo>
+                    <a:pt x="2506788" y="2696567"/>
+                  </a:lnTo>
+                  <a:lnTo>
+                    <a:pt x="2435165" y="2701470"/>
+                  </a:lnTo>
+                  <a:lnTo>
+                    <a:pt x="2363543" y="2706341"/>
+                  </a:lnTo>
+                  <a:lnTo>
+                    <a:pt x="2291920" y="2711183"/>
+                  </a:lnTo>
+                  <a:lnTo>
+                    <a:pt x="2220298" y="2715994"/>
+                  </a:lnTo>
+                  <a:lnTo>
+                    <a:pt x="2148675" y="2720775"/>
+                  </a:lnTo>
+                  <a:lnTo>
+                    <a:pt x="2077053" y="2725527"/>
+                  </a:lnTo>
+                  <a:lnTo>
+                    <a:pt x="2005430" y="2730249"/>
+                  </a:lnTo>
+                  <a:lnTo>
+                    <a:pt x="1933808" y="2734941"/>
+                  </a:lnTo>
+                  <a:lnTo>
+                    <a:pt x="1862185" y="2739605"/>
+                  </a:lnTo>
+                  <a:lnTo>
+                    <a:pt x="1790563" y="2744239"/>
+                  </a:lnTo>
+                  <a:lnTo>
+                    <a:pt x="1718940" y="2748844"/>
+                  </a:lnTo>
+                  <a:lnTo>
+                    <a:pt x="1647318" y="2753421"/>
+                  </a:lnTo>
+                  <a:lnTo>
+                    <a:pt x="1575695" y="2757969"/>
+                  </a:lnTo>
+                  <a:lnTo>
+                    <a:pt x="1504073" y="2762489"/>
+                  </a:lnTo>
+                  <a:lnTo>
+                    <a:pt x="1432450" y="2766981"/>
+                  </a:lnTo>
+                  <a:lnTo>
+                    <a:pt x="1360827" y="2771445"/>
+                  </a:lnTo>
+                  <a:lnTo>
+                    <a:pt x="1289205" y="2775881"/>
+                  </a:lnTo>
+                  <a:lnTo>
+                    <a:pt x="1217582" y="2780289"/>
+                  </a:lnTo>
+                  <a:lnTo>
+                    <a:pt x="1145960" y="2784670"/>
+                  </a:lnTo>
+                  <a:lnTo>
+                    <a:pt x="1074337" y="2789023"/>
+                  </a:lnTo>
+                  <a:lnTo>
+                    <a:pt x="1002715" y="2793350"/>
+                  </a:lnTo>
+                  <a:lnTo>
+                    <a:pt x="931092" y="2797649"/>
+                  </a:lnTo>
+                  <a:lnTo>
+                    <a:pt x="859470" y="2801922"/>
+                  </a:lnTo>
+                  <a:lnTo>
+                    <a:pt x="787847" y="2806168"/>
+                  </a:lnTo>
+                  <a:lnTo>
+                    <a:pt x="716225" y="2810388"/>
+                  </a:lnTo>
+                  <a:lnTo>
+                    <a:pt x="644602" y="2814581"/>
+                  </a:lnTo>
+                  <a:lnTo>
+                    <a:pt x="572980" y="2818749"/>
+                  </a:lnTo>
+                  <a:lnTo>
+                    <a:pt x="501357" y="2822890"/>
+                  </a:lnTo>
+                  <a:lnTo>
+                    <a:pt x="429735" y="2827006"/>
+                  </a:lnTo>
+                  <a:lnTo>
+                    <a:pt x="358112" y="2831096"/>
+                  </a:lnTo>
+                  <a:lnTo>
+                    <a:pt x="286490" y="2835160"/>
+                  </a:lnTo>
+                  <a:lnTo>
+                    <a:pt x="214867" y="2839199"/>
+                  </a:lnTo>
+                  <a:lnTo>
+                    <a:pt x="143245" y="2843213"/>
+                  </a:lnTo>
+                  <a:lnTo>
+                    <a:pt x="71622" y="2847202"/>
+                  </a:lnTo>
+                  <a:lnTo>
+                    <a:pt x="0" y="2851166"/>
                   </a:lnTo>
                   <a:close/>
                 </a:path>
@@ -3600,279 +3600,279 @@
           </p:nvSpPr>
           <p:spPr>
             <a:xfrm>
-              <a:off x="1975515" y="2073503"/>
-              <a:ext cx="6287163" cy="2652948"/>
+              <a:off x="2009190" y="2073503"/>
+              <a:ext cx="6253488" cy="2651041"/>
             </a:xfrm>
             <a:custGeom>
               <a:avLst/>
               <a:pathLst>
-                <a:path w="6287163" h="2652948">
+                <a:path w="6253488" h="2651041">
                   <a:moveTo>
                     <a:pt x="0" y="0"/>
                   </a:moveTo>
                   <a:lnTo>
-                    <a:pt x="56003" y="121286"/>
-                  </a:lnTo>
-                  <a:lnTo>
-                    <a:pt x="127626" y="269558"/>
-                  </a:lnTo>
-                  <a:lnTo>
-                    <a:pt x="199249" y="411292"/>
-                  </a:lnTo>
-                  <a:lnTo>
-                    <a:pt x="270871" y="546776"/>
-                  </a:lnTo>
-                  <a:lnTo>
-                    <a:pt x="342494" y="676286"/>
-                  </a:lnTo>
-                  <a:lnTo>
-                    <a:pt x="414116" y="800084"/>
-                  </a:lnTo>
-                  <a:lnTo>
-                    <a:pt x="485739" y="918424"/>
-                  </a:lnTo>
-                  <a:lnTo>
-                    <a:pt x="557361" y="1031545"/>
-                  </a:lnTo>
-                  <a:lnTo>
-                    <a:pt x="628984" y="1139678"/>
-                  </a:lnTo>
-                  <a:lnTo>
-                    <a:pt x="700606" y="1243043"/>
-                  </a:lnTo>
-                  <a:lnTo>
-                    <a:pt x="772229" y="1341849"/>
-                  </a:lnTo>
-                  <a:lnTo>
-                    <a:pt x="843851" y="1436299"/>
-                  </a:lnTo>
-                  <a:lnTo>
-                    <a:pt x="915474" y="1526584"/>
-                  </a:lnTo>
-                  <a:lnTo>
-                    <a:pt x="987096" y="1612887"/>
-                  </a:lnTo>
-                  <a:lnTo>
-                    <a:pt x="1058719" y="1695385"/>
-                  </a:lnTo>
-                  <a:lnTo>
-                    <a:pt x="1130341" y="1774245"/>
-                  </a:lnTo>
-                  <a:lnTo>
-                    <a:pt x="1201964" y="1849628"/>
-                  </a:lnTo>
-                  <a:lnTo>
-                    <a:pt x="1273586" y="1921687"/>
-                  </a:lnTo>
-                  <a:lnTo>
-                    <a:pt x="1345209" y="1990568"/>
-                  </a:lnTo>
-                  <a:lnTo>
-                    <a:pt x="1416831" y="2056411"/>
-                  </a:lnTo>
-                  <a:lnTo>
-                    <a:pt x="1488454" y="2119351"/>
-                  </a:lnTo>
-                  <a:lnTo>
-                    <a:pt x="1560077" y="2179516"/>
-                  </a:lnTo>
-                  <a:lnTo>
-                    <a:pt x="1631699" y="2237028"/>
-                  </a:lnTo>
-                  <a:lnTo>
-                    <a:pt x="1703322" y="2292003"/>
-                  </a:lnTo>
-                  <a:lnTo>
-                    <a:pt x="1774944" y="2344555"/>
-                  </a:lnTo>
-                  <a:lnTo>
-                    <a:pt x="1846567" y="2394789"/>
-                  </a:lnTo>
-                  <a:lnTo>
-                    <a:pt x="1918189" y="2442808"/>
-                  </a:lnTo>
-                  <a:lnTo>
-                    <a:pt x="1989812" y="2488710"/>
-                  </a:lnTo>
-                  <a:lnTo>
-                    <a:pt x="2061434" y="2532587"/>
-                  </a:lnTo>
-                  <a:lnTo>
-                    <a:pt x="2133057" y="2574530"/>
-                  </a:lnTo>
-                  <a:lnTo>
-                    <a:pt x="2204679" y="2614623"/>
-                  </a:lnTo>
-                  <a:lnTo>
-                    <a:pt x="2276302" y="2652948"/>
-                  </a:lnTo>
-                  <a:lnTo>
-                    <a:pt x="2347924" y="2649200"/>
-                  </a:lnTo>
-                  <a:lnTo>
-                    <a:pt x="2419547" y="2643897"/>
-                  </a:lnTo>
-                  <a:lnTo>
-                    <a:pt x="2491169" y="2638559"/>
-                  </a:lnTo>
-                  <a:lnTo>
-                    <a:pt x="2562792" y="2633188"/>
-                  </a:lnTo>
-                  <a:lnTo>
-                    <a:pt x="2634414" y="2627783"/>
-                  </a:lnTo>
-                  <a:lnTo>
-                    <a:pt x="2706037" y="2622343"/>
-                  </a:lnTo>
-                  <a:lnTo>
-                    <a:pt x="2777659" y="2616869"/>
-                  </a:lnTo>
-                  <a:lnTo>
-                    <a:pt x="2849282" y="2611360"/>
-                  </a:lnTo>
-                  <a:lnTo>
-                    <a:pt x="2920905" y="2605816"/>
-                  </a:lnTo>
-                  <a:lnTo>
-                    <a:pt x="2992527" y="2600237"/>
-                  </a:lnTo>
-                  <a:lnTo>
-                    <a:pt x="3064150" y="2594622"/>
-                  </a:lnTo>
-                  <a:lnTo>
-                    <a:pt x="3135772" y="2588972"/>
-                  </a:lnTo>
-                  <a:lnTo>
-                    <a:pt x="3207395" y="2583286"/>
-                  </a:lnTo>
-                  <a:lnTo>
-                    <a:pt x="3279017" y="2577563"/>
-                  </a:lnTo>
-                  <a:lnTo>
-                    <a:pt x="3350640" y="2571805"/>
-                  </a:lnTo>
-                  <a:lnTo>
-                    <a:pt x="3422262" y="2566009"/>
-                  </a:lnTo>
-                  <a:lnTo>
-                    <a:pt x="3493885" y="2560177"/>
-                  </a:lnTo>
-                  <a:lnTo>
-                    <a:pt x="3565507" y="2554308"/>
-                  </a:lnTo>
-                  <a:lnTo>
-                    <a:pt x="3637130" y="2548401"/>
-                  </a:lnTo>
-                  <a:lnTo>
-                    <a:pt x="3708752" y="2542457"/>
-                  </a:lnTo>
-                  <a:lnTo>
-                    <a:pt x="3780375" y="2536475"/>
-                  </a:lnTo>
-                  <a:lnTo>
-                    <a:pt x="3851997" y="2530456"/>
-                  </a:lnTo>
-                  <a:lnTo>
-                    <a:pt x="3923620" y="2524397"/>
-                  </a:lnTo>
-                  <a:lnTo>
-                    <a:pt x="3995242" y="2518301"/>
-                  </a:lnTo>
-                  <a:lnTo>
-                    <a:pt x="4066865" y="2512166"/>
-                  </a:lnTo>
-                  <a:lnTo>
-                    <a:pt x="4138487" y="2505991"/>
-                  </a:lnTo>
-                  <a:lnTo>
-                    <a:pt x="4210110" y="2499778"/>
-                  </a:lnTo>
-                  <a:lnTo>
-                    <a:pt x="4281733" y="2493524"/>
-                  </a:lnTo>
-                  <a:lnTo>
-                    <a:pt x="4353355" y="2487232"/>
-                  </a:lnTo>
-                  <a:lnTo>
-                    <a:pt x="4424978" y="2480899"/>
-                  </a:lnTo>
-                  <a:lnTo>
-                    <a:pt x="4496600" y="2474526"/>
-                  </a:lnTo>
-                  <a:lnTo>
-                    <a:pt x="4568223" y="2468112"/>
-                  </a:lnTo>
-                  <a:lnTo>
-                    <a:pt x="4639845" y="2461658"/>
-                  </a:lnTo>
-                  <a:lnTo>
-                    <a:pt x="4711468" y="2455163"/>
-                  </a:lnTo>
-                  <a:lnTo>
-                    <a:pt x="4783090" y="2448626"/>
-                  </a:lnTo>
-                  <a:lnTo>
-                    <a:pt x="4854713" y="2442048"/>
-                  </a:lnTo>
-                  <a:lnTo>
-                    <a:pt x="4926335" y="2435428"/>
-                  </a:lnTo>
-                  <a:lnTo>
-                    <a:pt x="4997958" y="2428766"/>
-                  </a:lnTo>
-                  <a:lnTo>
-                    <a:pt x="5069580" y="2422062"/>
-                  </a:lnTo>
-                  <a:lnTo>
-                    <a:pt x="5141203" y="2415315"/>
-                  </a:lnTo>
-                  <a:lnTo>
-                    <a:pt x="5212825" y="2408525"/>
-                  </a:lnTo>
-                  <a:lnTo>
-                    <a:pt x="5284448" y="2401692"/>
-                  </a:lnTo>
-                  <a:lnTo>
-                    <a:pt x="5356070" y="2394815"/>
-                  </a:lnTo>
-                  <a:lnTo>
-                    <a:pt x="5427693" y="2387895"/>
-                  </a:lnTo>
-                  <a:lnTo>
-                    <a:pt x="5499315" y="2380931"/>
-                  </a:lnTo>
-                  <a:lnTo>
-                    <a:pt x="5570938" y="2373923"/>
-                  </a:lnTo>
-                  <a:lnTo>
-                    <a:pt x="5642561" y="2366870"/>
-                  </a:lnTo>
-                  <a:lnTo>
-                    <a:pt x="5714183" y="2359772"/>
-                  </a:lnTo>
-                  <a:lnTo>
-                    <a:pt x="5785806" y="2352629"/>
-                  </a:lnTo>
-                  <a:lnTo>
-                    <a:pt x="5857428" y="2345441"/>
-                  </a:lnTo>
-                  <a:lnTo>
-                    <a:pt x="5929051" y="2338207"/>
-                  </a:lnTo>
-                  <a:lnTo>
-                    <a:pt x="6000673" y="2330927"/>
-                  </a:lnTo>
-                  <a:lnTo>
-                    <a:pt x="6072296" y="2323601"/>
-                  </a:lnTo>
-                  <a:lnTo>
-                    <a:pt x="6143918" y="2316229"/>
-                  </a:lnTo>
-                  <a:lnTo>
-                    <a:pt x="6215541" y="2308809"/>
-                  </a:lnTo>
-                  <a:lnTo>
-                    <a:pt x="6287163" y="2301342"/>
+                    <a:pt x="22328" y="49594"/>
+                  </a:lnTo>
+                  <a:lnTo>
+                    <a:pt x="93951" y="201630"/>
+                  </a:lnTo>
+                  <a:lnTo>
+                    <a:pt x="165573" y="346936"/>
+                  </a:lnTo>
+                  <a:lnTo>
+                    <a:pt x="237196" y="485808"/>
+                  </a:lnTo>
+                  <a:lnTo>
+                    <a:pt x="308818" y="618533"/>
+                  </a:lnTo>
+                  <a:lnTo>
+                    <a:pt x="380441" y="745381"/>
+                  </a:lnTo>
+                  <a:lnTo>
+                    <a:pt x="452064" y="866614"/>
+                  </a:lnTo>
+                  <a:lnTo>
+                    <a:pt x="523686" y="982479"/>
+                  </a:lnTo>
+                  <a:lnTo>
+                    <a:pt x="595309" y="1093215"/>
+                  </a:lnTo>
+                  <a:lnTo>
+                    <a:pt x="666931" y="1199048"/>
+                  </a:lnTo>
+                  <a:lnTo>
+                    <a:pt x="738554" y="1300196"/>
+                  </a:lnTo>
+                  <a:lnTo>
+                    <a:pt x="810176" y="1396866"/>
+                  </a:lnTo>
+                  <a:lnTo>
+                    <a:pt x="881799" y="1489256"/>
+                  </a:lnTo>
+                  <a:lnTo>
+                    <a:pt x="953421" y="1577556"/>
+                  </a:lnTo>
+                  <a:lnTo>
+                    <a:pt x="1025044" y="1661947"/>
+                  </a:lnTo>
+                  <a:lnTo>
+                    <a:pt x="1096666" y="1742601"/>
+                  </a:lnTo>
+                  <a:lnTo>
+                    <a:pt x="1168289" y="1819685"/>
+                  </a:lnTo>
+                  <a:lnTo>
+                    <a:pt x="1239911" y="1893356"/>
+                  </a:lnTo>
+                  <a:lnTo>
+                    <a:pt x="1311534" y="1963766"/>
+                  </a:lnTo>
+                  <a:lnTo>
+                    <a:pt x="1383156" y="2031058"/>
+                  </a:lnTo>
+                  <a:lnTo>
+                    <a:pt x="1454779" y="2095372"/>
+                  </a:lnTo>
+                  <a:lnTo>
+                    <a:pt x="1526401" y="2156838"/>
+                  </a:lnTo>
+                  <a:lnTo>
+                    <a:pt x="1598024" y="2215582"/>
+                  </a:lnTo>
+                  <a:lnTo>
+                    <a:pt x="1669646" y="2271726"/>
+                  </a:lnTo>
+                  <a:lnTo>
+                    <a:pt x="1741269" y="2325385"/>
+                  </a:lnTo>
+                  <a:lnTo>
+                    <a:pt x="1812892" y="2376668"/>
+                  </a:lnTo>
+                  <a:lnTo>
+                    <a:pt x="1884514" y="2425680"/>
+                  </a:lnTo>
+                  <a:lnTo>
+                    <a:pt x="1956137" y="2472523"/>
+                  </a:lnTo>
+                  <a:lnTo>
+                    <a:pt x="2027759" y="2517292"/>
+                  </a:lnTo>
+                  <a:lnTo>
+                    <a:pt x="2099382" y="2560078"/>
+                  </a:lnTo>
+                  <a:lnTo>
+                    <a:pt x="2171004" y="2600971"/>
+                  </a:lnTo>
+                  <a:lnTo>
+                    <a:pt x="2242627" y="2640053"/>
+                  </a:lnTo>
+                  <a:lnTo>
+                    <a:pt x="2314249" y="2651041"/>
+                  </a:lnTo>
+                  <a:lnTo>
+                    <a:pt x="2385872" y="2645823"/>
+                  </a:lnTo>
+                  <a:lnTo>
+                    <a:pt x="2457494" y="2640572"/>
+                  </a:lnTo>
+                  <a:lnTo>
+                    <a:pt x="2529117" y="2635288"/>
+                  </a:lnTo>
+                  <a:lnTo>
+                    <a:pt x="2600739" y="2629971"/>
+                  </a:lnTo>
+                  <a:lnTo>
+                    <a:pt x="2672362" y="2624621"/>
+                  </a:lnTo>
+                  <a:lnTo>
+                    <a:pt x="2743984" y="2619237"/>
+                  </a:lnTo>
+                  <a:lnTo>
+                    <a:pt x="2815607" y="2613819"/>
+                  </a:lnTo>
+                  <a:lnTo>
+                    <a:pt x="2887229" y="2608368"/>
+                  </a:lnTo>
+                  <a:lnTo>
+                    <a:pt x="2958852" y="2602882"/>
+                  </a:lnTo>
+                  <a:lnTo>
+                    <a:pt x="3030474" y="2597362"/>
+                  </a:lnTo>
+                  <a:lnTo>
+                    <a:pt x="3102097" y="2591807"/>
+                  </a:lnTo>
+                  <a:lnTo>
+                    <a:pt x="3173720" y="2586218"/>
+                  </a:lnTo>
+                  <a:lnTo>
+                    <a:pt x="3245342" y="2580593"/>
+                  </a:lnTo>
+                  <a:lnTo>
+                    <a:pt x="3316965" y="2574934"/>
+                  </a:lnTo>
+                  <a:lnTo>
+                    <a:pt x="3388587" y="2569238"/>
+                  </a:lnTo>
+                  <a:lnTo>
+                    <a:pt x="3460210" y="2563507"/>
+                  </a:lnTo>
+                  <a:lnTo>
+                    <a:pt x="3531832" y="2557741"/>
+                  </a:lnTo>
+                  <a:lnTo>
+                    <a:pt x="3603455" y="2551938"/>
+                  </a:lnTo>
+                  <a:lnTo>
+                    <a:pt x="3675077" y="2546098"/>
+                  </a:lnTo>
+                  <a:lnTo>
+                    <a:pt x="3746700" y="2540222"/>
+                  </a:lnTo>
+                  <a:lnTo>
+                    <a:pt x="3818322" y="2534310"/>
+                  </a:lnTo>
+                  <a:lnTo>
+                    <a:pt x="3889945" y="2528360"/>
+                  </a:lnTo>
+                  <a:lnTo>
+                    <a:pt x="3961567" y="2522373"/>
+                  </a:lnTo>
+                  <a:lnTo>
+                    <a:pt x="4033190" y="2516348"/>
+                  </a:lnTo>
+                  <a:lnTo>
+                    <a:pt x="4104812" y="2510286"/>
+                  </a:lnTo>
+                  <a:lnTo>
+                    <a:pt x="4176435" y="2504185"/>
+                  </a:lnTo>
+                  <a:lnTo>
+                    <a:pt x="4248057" y="2498047"/>
+                  </a:lnTo>
+                  <a:lnTo>
+                    <a:pt x="4319680" y="2491870"/>
+                  </a:lnTo>
+                  <a:lnTo>
+                    <a:pt x="4391302" y="2485654"/>
+                  </a:lnTo>
+                  <a:lnTo>
+                    <a:pt x="4462925" y="2479399"/>
+                  </a:lnTo>
+                  <a:lnTo>
+                    <a:pt x="4534548" y="2473105"/>
+                  </a:lnTo>
+                  <a:lnTo>
+                    <a:pt x="4606170" y="2466772"/>
+                  </a:lnTo>
+                  <a:lnTo>
+                    <a:pt x="4677793" y="2460399"/>
+                  </a:lnTo>
+                  <a:lnTo>
+                    <a:pt x="4749415" y="2453986"/>
+                  </a:lnTo>
+                  <a:lnTo>
+                    <a:pt x="4821038" y="2447533"/>
+                  </a:lnTo>
+                  <a:lnTo>
+                    <a:pt x="4892660" y="2441039"/>
+                  </a:lnTo>
+                  <a:lnTo>
+                    <a:pt x="4964283" y="2434505"/>
+                  </a:lnTo>
+                  <a:lnTo>
+                    <a:pt x="5035905" y="2427930"/>
+                  </a:lnTo>
+                  <a:lnTo>
+                    <a:pt x="5107528" y="2421313"/>
+                  </a:lnTo>
+                  <a:lnTo>
+                    <a:pt x="5179150" y="2414655"/>
+                  </a:lnTo>
+                  <a:lnTo>
+                    <a:pt x="5250773" y="2407956"/>
+                  </a:lnTo>
+                  <a:lnTo>
+                    <a:pt x="5322395" y="2401214"/>
+                  </a:lnTo>
+                  <a:lnTo>
+                    <a:pt x="5394018" y="2394430"/>
+                  </a:lnTo>
+                  <a:lnTo>
+                    <a:pt x="5465640" y="2387604"/>
+                  </a:lnTo>
+                  <a:lnTo>
+                    <a:pt x="5537263" y="2380735"/>
+                  </a:lnTo>
+                  <a:lnTo>
+                    <a:pt x="5608885" y="2373823"/>
+                  </a:lnTo>
+                  <a:lnTo>
+                    <a:pt x="5680508" y="2366867"/>
+                  </a:lnTo>
+                  <a:lnTo>
+                    <a:pt x="5752130" y="2359868"/>
+                  </a:lnTo>
+                  <a:lnTo>
+                    <a:pt x="5823753" y="2352825"/>
+                  </a:lnTo>
+                  <a:lnTo>
+                    <a:pt x="5895376" y="2345738"/>
+                  </a:lnTo>
+                  <a:lnTo>
+                    <a:pt x="5966998" y="2338606"/>
+                  </a:lnTo>
+                  <a:lnTo>
+                    <a:pt x="6038621" y="2331430"/>
+                  </a:lnTo>
+                  <a:lnTo>
+                    <a:pt x="6110243" y="2324209"/>
+                  </a:lnTo>
+                  <a:lnTo>
+                    <a:pt x="6181866" y="2316942"/>
+                  </a:lnTo>
+                  <a:lnTo>
+                    <a:pt x="6253488" y="2309630"/>
                   </a:lnTo>
                 </a:path>
               </a:pathLst>
@@ -3892,312 +3892,312 @@
           </p:nvSpPr>
           <p:spPr>
             <a:xfrm>
-              <a:off x="1172049" y="4727973"/>
-              <a:ext cx="7090630" cy="762796"/>
+              <a:off x="1172049" y="4729730"/>
+              <a:ext cx="7090630" cy="760699"/>
             </a:xfrm>
             <a:custGeom>
               <a:avLst/>
               <a:pathLst>
-                <a:path w="7090630" h="762796">
+                <a:path w="7090630" h="760699">
                   <a:moveTo>
-                    <a:pt x="7090630" y="762796"/>
+                    <a:pt x="7090630" y="760699"/>
                   </a:moveTo>
                   <a:lnTo>
-                    <a:pt x="7019007" y="759729"/>
-                  </a:lnTo>
-                  <a:lnTo>
-                    <a:pt x="6947385" y="756521"/>
-                  </a:lnTo>
-                  <a:lnTo>
-                    <a:pt x="6875762" y="753165"/>
-                  </a:lnTo>
-                  <a:lnTo>
-                    <a:pt x="6804139" y="749654"/>
-                  </a:lnTo>
-                  <a:lnTo>
-                    <a:pt x="6732517" y="745981"/>
-                  </a:lnTo>
-                  <a:lnTo>
-                    <a:pt x="6660894" y="742139"/>
-                  </a:lnTo>
-                  <a:lnTo>
-                    <a:pt x="6589272" y="738119"/>
-                  </a:lnTo>
-                  <a:lnTo>
-                    <a:pt x="6517649" y="733914"/>
-                  </a:lnTo>
-                  <a:lnTo>
-                    <a:pt x="6446027" y="729515"/>
-                  </a:lnTo>
-                  <a:lnTo>
-                    <a:pt x="6374404" y="724913"/>
-                  </a:lnTo>
-                  <a:lnTo>
-                    <a:pt x="6302782" y="720098"/>
-                  </a:lnTo>
-                  <a:lnTo>
-                    <a:pt x="6231159" y="715062"/>
-                  </a:lnTo>
-                  <a:lnTo>
-                    <a:pt x="6159537" y="709793"/>
-                  </a:lnTo>
-                  <a:lnTo>
-                    <a:pt x="6087914" y="704281"/>
-                  </a:lnTo>
-                  <a:lnTo>
-                    <a:pt x="6016292" y="698515"/>
-                  </a:lnTo>
-                  <a:lnTo>
-                    <a:pt x="5944669" y="692483"/>
-                  </a:lnTo>
-                  <a:lnTo>
-                    <a:pt x="5873047" y="686173"/>
-                  </a:lnTo>
-                  <a:lnTo>
-                    <a:pt x="5801424" y="679572"/>
-                  </a:lnTo>
-                  <a:lnTo>
-                    <a:pt x="5729802" y="672666"/>
-                  </a:lnTo>
-                  <a:lnTo>
-                    <a:pt x="5658179" y="665441"/>
-                  </a:lnTo>
-                  <a:lnTo>
-                    <a:pt x="5586557" y="657883"/>
-                  </a:lnTo>
-                  <a:lnTo>
-                    <a:pt x="5514934" y="649977"/>
-                  </a:lnTo>
-                  <a:lnTo>
-                    <a:pt x="5443311" y="641706"/>
-                  </a:lnTo>
-                  <a:lnTo>
-                    <a:pt x="5371689" y="633053"/>
-                  </a:lnTo>
-                  <a:lnTo>
-                    <a:pt x="5300066" y="624001"/>
-                  </a:lnTo>
-                  <a:lnTo>
-                    <a:pt x="5228444" y="614532"/>
-                  </a:lnTo>
-                  <a:lnTo>
-                    <a:pt x="5156821" y="604626"/>
-                  </a:lnTo>
-                  <a:lnTo>
-                    <a:pt x="5085199" y="594263"/>
-                  </a:lnTo>
-                  <a:lnTo>
-                    <a:pt x="5013576" y="583421"/>
-                  </a:lnTo>
-                  <a:lnTo>
-                    <a:pt x="4941954" y="572080"/>
-                  </a:lnTo>
-                  <a:lnTo>
-                    <a:pt x="4870331" y="560215"/>
-                  </a:lnTo>
-                  <a:lnTo>
-                    <a:pt x="4798709" y="547804"/>
-                  </a:lnTo>
-                  <a:lnTo>
-                    <a:pt x="4727086" y="534819"/>
-                  </a:lnTo>
-                  <a:lnTo>
-                    <a:pt x="4655464" y="521236"/>
-                  </a:lnTo>
-                  <a:lnTo>
-                    <a:pt x="4583841" y="507026"/>
-                  </a:lnTo>
-                  <a:lnTo>
-                    <a:pt x="4512219" y="492160"/>
-                  </a:lnTo>
-                  <a:lnTo>
-                    <a:pt x="4440596" y="476609"/>
-                  </a:lnTo>
-                  <a:lnTo>
-                    <a:pt x="4368974" y="460340"/>
-                  </a:lnTo>
-                  <a:lnTo>
-                    <a:pt x="4297351" y="443321"/>
-                  </a:lnTo>
-                  <a:lnTo>
-                    <a:pt x="4225729" y="425517"/>
-                  </a:lnTo>
-                  <a:lnTo>
-                    <a:pt x="4154106" y="406891"/>
-                  </a:lnTo>
-                  <a:lnTo>
-                    <a:pt x="4082483" y="387406"/>
-                  </a:lnTo>
-                  <a:lnTo>
-                    <a:pt x="4010861" y="367023"/>
-                  </a:lnTo>
-                  <a:lnTo>
-                    <a:pt x="3939238" y="345699"/>
-                  </a:lnTo>
-                  <a:lnTo>
-                    <a:pt x="3867616" y="323391"/>
-                  </a:lnTo>
-                  <a:lnTo>
-                    <a:pt x="3795993" y="300054"/>
-                  </a:lnTo>
-                  <a:lnTo>
-                    <a:pt x="3724371" y="275641"/>
-                  </a:lnTo>
-                  <a:lnTo>
-                    <a:pt x="3652748" y="250102"/>
-                  </a:lnTo>
-                  <a:lnTo>
-                    <a:pt x="3581126" y="223384"/>
-                  </a:lnTo>
-                  <a:lnTo>
-                    <a:pt x="3509503" y="195434"/>
-                  </a:lnTo>
-                  <a:lnTo>
-                    <a:pt x="3437881" y="166195"/>
-                  </a:lnTo>
-                  <a:lnTo>
-                    <a:pt x="3366258" y="135607"/>
-                  </a:lnTo>
-                  <a:lnTo>
-                    <a:pt x="3294636" y="103607"/>
-                  </a:lnTo>
-                  <a:lnTo>
-                    <a:pt x="3223013" y="70132"/>
-                  </a:lnTo>
-                  <a:lnTo>
-                    <a:pt x="3151391" y="35112"/>
+                    <a:pt x="7019007" y="757603"/>
+                  </a:lnTo>
+                  <a:lnTo>
+                    <a:pt x="6947385" y="754365"/>
+                  </a:lnTo>
+                  <a:lnTo>
+                    <a:pt x="6875762" y="750976"/>
+                  </a:lnTo>
+                  <a:lnTo>
+                    <a:pt x="6804139" y="747430"/>
+                  </a:lnTo>
+                  <a:lnTo>
+                    <a:pt x="6732517" y="743720"/>
+                  </a:lnTo>
+                  <a:lnTo>
+                    <a:pt x="6660894" y="739838"/>
+                  </a:lnTo>
+                  <a:lnTo>
+                    <a:pt x="6589272" y="735777"/>
+                  </a:lnTo>
+                  <a:lnTo>
+                    <a:pt x="6517649" y="731527"/>
+                  </a:lnTo>
+                  <a:lnTo>
+                    <a:pt x="6446027" y="727081"/>
+                  </a:lnTo>
+                  <a:lnTo>
+                    <a:pt x="6374404" y="722428"/>
+                  </a:lnTo>
+                  <a:lnTo>
+                    <a:pt x="6302782" y="717560"/>
+                  </a:lnTo>
+                  <a:lnTo>
+                    <a:pt x="6231159" y="712466"/>
+                  </a:lnTo>
+                  <a:lnTo>
+                    <a:pt x="6159537" y="707137"/>
+                  </a:lnTo>
+                  <a:lnTo>
+                    <a:pt x="6087914" y="701560"/>
+                  </a:lnTo>
+                  <a:lnTo>
+                    <a:pt x="6016292" y="695726"/>
+                  </a:lnTo>
+                  <a:lnTo>
+                    <a:pt x="5944669" y="689621"/>
+                  </a:lnTo>
+                  <a:lnTo>
+                    <a:pt x="5873047" y="683233"/>
+                  </a:lnTo>
+                  <a:lnTo>
+                    <a:pt x="5801424" y="676549"/>
+                  </a:lnTo>
+                  <a:lnTo>
+                    <a:pt x="5729802" y="669556"/>
+                  </a:lnTo>
+                  <a:lnTo>
+                    <a:pt x="5658179" y="662238"/>
+                  </a:lnTo>
+                  <a:lnTo>
+                    <a:pt x="5586557" y="654582"/>
+                  </a:lnTo>
+                  <a:lnTo>
+                    <a:pt x="5514934" y="646571"/>
+                  </a:lnTo>
+                  <a:lnTo>
+                    <a:pt x="5443311" y="638189"/>
+                  </a:lnTo>
+                  <a:lnTo>
+                    <a:pt x="5371689" y="629419"/>
+                  </a:lnTo>
+                  <a:lnTo>
+                    <a:pt x="5300066" y="620243"/>
+                  </a:lnTo>
+                  <a:lnTo>
+                    <a:pt x="5228444" y="610641"/>
+                  </a:lnTo>
+                  <a:lnTo>
+                    <a:pt x="5156821" y="600595"/>
+                  </a:lnTo>
+                  <a:lnTo>
+                    <a:pt x="5085199" y="590083"/>
+                  </a:lnTo>
+                  <a:lnTo>
+                    <a:pt x="5013576" y="579084"/>
+                  </a:lnTo>
+                  <a:lnTo>
+                    <a:pt x="4941954" y="567576"/>
+                  </a:lnTo>
+                  <a:lnTo>
+                    <a:pt x="4870331" y="555535"/>
+                  </a:lnTo>
+                  <a:lnTo>
+                    <a:pt x="4798709" y="542936"/>
+                  </a:lnTo>
+                  <a:lnTo>
+                    <a:pt x="4727086" y="529753"/>
+                  </a:lnTo>
+                  <a:lnTo>
+                    <a:pt x="4655464" y="515960"/>
+                  </a:lnTo>
+                  <a:lnTo>
+                    <a:pt x="4583841" y="501527"/>
+                  </a:lnTo>
+                  <a:lnTo>
+                    <a:pt x="4512219" y="486427"/>
+                  </a:lnTo>
+                  <a:lnTo>
+                    <a:pt x="4440596" y="470626"/>
+                  </a:lnTo>
+                  <a:lnTo>
+                    <a:pt x="4368974" y="454094"/>
+                  </a:lnTo>
+                  <a:lnTo>
+                    <a:pt x="4297351" y="436796"/>
+                  </a:lnTo>
+                  <a:lnTo>
+                    <a:pt x="4225729" y="418697"/>
+                  </a:lnTo>
+                  <a:lnTo>
+                    <a:pt x="4154106" y="399759"/>
+                  </a:lnTo>
+                  <a:lnTo>
+                    <a:pt x="4082483" y="379944"/>
+                  </a:lnTo>
+                  <a:lnTo>
+                    <a:pt x="4010861" y="359211"/>
+                  </a:lnTo>
+                  <a:lnTo>
+                    <a:pt x="3939238" y="337518"/>
+                  </a:lnTo>
+                  <a:lnTo>
+                    <a:pt x="3867616" y="314820"/>
+                  </a:lnTo>
+                  <a:lnTo>
+                    <a:pt x="3795993" y="291070"/>
+                  </a:lnTo>
+                  <a:lnTo>
+                    <a:pt x="3724371" y="266220"/>
+                  </a:lnTo>
+                  <a:lnTo>
+                    <a:pt x="3652748" y="240220"/>
+                  </a:lnTo>
+                  <a:lnTo>
+                    <a:pt x="3581126" y="213014"/>
+                  </a:lnTo>
+                  <a:lnTo>
+                    <a:pt x="3509503" y="184549"/>
+                  </a:lnTo>
+                  <a:lnTo>
+                    <a:pt x="3437881" y="154765"/>
+                  </a:lnTo>
+                  <a:lnTo>
+                    <a:pt x="3366258" y="123601"/>
+                  </a:lnTo>
+                  <a:lnTo>
+                    <a:pt x="3294636" y="90993"/>
+                  </a:lnTo>
+                  <a:lnTo>
+                    <a:pt x="3223013" y="56876"/>
+                  </a:lnTo>
+                  <a:lnTo>
+                    <a:pt x="3151391" y="21177"/>
                   </a:lnTo>
                   <a:lnTo>
                     <a:pt x="3079768" y="0"/>
                   </a:lnTo>
                   <a:lnTo>
-                    <a:pt x="3008146" y="5236"/>
-                  </a:lnTo>
-                  <a:lnTo>
-                    <a:pt x="2936523" y="10440"/>
-                  </a:lnTo>
-                  <a:lnTo>
-                    <a:pt x="2864901" y="15611"/>
-                  </a:lnTo>
-                  <a:lnTo>
-                    <a:pt x="2793278" y="20749"/>
-                  </a:lnTo>
-                  <a:lnTo>
-                    <a:pt x="2721655" y="25855"/>
-                  </a:lnTo>
-                  <a:lnTo>
-                    <a:pt x="2650033" y="30928"/>
-                  </a:lnTo>
-                  <a:lnTo>
-                    <a:pt x="2578410" y="35969"/>
-                  </a:lnTo>
-                  <a:lnTo>
-                    <a:pt x="2506788" y="40979"/>
-                  </a:lnTo>
-                  <a:lnTo>
-                    <a:pt x="2435165" y="45957"/>
-                  </a:lnTo>
-                  <a:lnTo>
-                    <a:pt x="2363543" y="50904"/>
-                  </a:lnTo>
-                  <a:lnTo>
-                    <a:pt x="2291920" y="55819"/>
-                  </a:lnTo>
-                  <a:lnTo>
-                    <a:pt x="2220298" y="60703"/>
-                  </a:lnTo>
-                  <a:lnTo>
-                    <a:pt x="2148675" y="65556"/>
-                  </a:lnTo>
-                  <a:lnTo>
-                    <a:pt x="2077053" y="70379"/>
-                  </a:lnTo>
-                  <a:lnTo>
-                    <a:pt x="2005430" y="75172"/>
-                  </a:lnTo>
-                  <a:lnTo>
-                    <a:pt x="1933808" y="79934"/>
-                  </a:lnTo>
-                  <a:lnTo>
-                    <a:pt x="1862185" y="84666"/>
-                  </a:lnTo>
-                  <a:lnTo>
-                    <a:pt x="1790563" y="89368"/>
-                  </a:lnTo>
-                  <a:lnTo>
-                    <a:pt x="1718940" y="94040"/>
-                  </a:lnTo>
-                  <a:lnTo>
-                    <a:pt x="1647318" y="98683"/>
-                  </a:lnTo>
-                  <a:lnTo>
-                    <a:pt x="1575695" y="103296"/>
-                  </a:lnTo>
-                  <a:lnTo>
-                    <a:pt x="1504073" y="107881"/>
-                  </a:lnTo>
-                  <a:lnTo>
-                    <a:pt x="1432450" y="112436"/>
-                  </a:lnTo>
-                  <a:lnTo>
-                    <a:pt x="1360827" y="116963"/>
-                  </a:lnTo>
-                  <a:lnTo>
-                    <a:pt x="1289205" y="121461"/>
-                  </a:lnTo>
-                  <a:lnTo>
-                    <a:pt x="1217582" y="125931"/>
-                  </a:lnTo>
-                  <a:lnTo>
-                    <a:pt x="1145960" y="130372"/>
-                  </a:lnTo>
-                  <a:lnTo>
-                    <a:pt x="1074337" y="134786"/>
-                  </a:lnTo>
-                  <a:lnTo>
-                    <a:pt x="1002715" y="139172"/>
-                  </a:lnTo>
-                  <a:lnTo>
-                    <a:pt x="931092" y="143529"/>
-                  </a:lnTo>
-                  <a:lnTo>
-                    <a:pt x="859470" y="147860"/>
-                  </a:lnTo>
-                  <a:lnTo>
-                    <a:pt x="787847" y="152163"/>
-                  </a:lnTo>
-                  <a:lnTo>
-                    <a:pt x="716225" y="156439"/>
-                  </a:lnTo>
-                  <a:lnTo>
-                    <a:pt x="644602" y="160687"/>
-                  </a:lnTo>
-                  <a:lnTo>
-                    <a:pt x="572980" y="164910"/>
-                  </a:lnTo>
-                  <a:lnTo>
-                    <a:pt x="501357" y="169105"/>
-                  </a:lnTo>
-                  <a:lnTo>
-                    <a:pt x="429735" y="173274"/>
-                  </a:lnTo>
-                  <a:lnTo>
-                    <a:pt x="358112" y="177416"/>
-                  </a:lnTo>
-                  <a:lnTo>
-                    <a:pt x="286490" y="181533"/>
-                  </a:lnTo>
-                  <a:lnTo>
-                    <a:pt x="214867" y="185623"/>
-                  </a:lnTo>
-                  <a:lnTo>
-                    <a:pt x="143245" y="189688"/>
-                  </a:lnTo>
-                  <a:lnTo>
-                    <a:pt x="71622" y="193726"/>
-                  </a:lnTo>
-                  <a:lnTo>
-                    <a:pt x="0" y="197740"/>
+                    <a:pt x="3008146" y="5153"/>
+                  </a:lnTo>
+                  <a:lnTo>
+                    <a:pt x="2936523" y="10274"/>
+                  </a:lnTo>
+                  <a:lnTo>
+                    <a:pt x="2864901" y="15364"/>
+                  </a:lnTo>
+                  <a:lnTo>
+                    <a:pt x="2793278" y="20422"/>
+                  </a:lnTo>
+                  <a:lnTo>
+                    <a:pt x="2721655" y="25448"/>
+                  </a:lnTo>
+                  <a:lnTo>
+                    <a:pt x="2650033" y="30443"/>
+                  </a:lnTo>
+                  <a:lnTo>
+                    <a:pt x="2578410" y="35407"/>
+                  </a:lnTo>
+                  <a:lnTo>
+                    <a:pt x="2506788" y="40340"/>
+                  </a:lnTo>
+                  <a:lnTo>
+                    <a:pt x="2435165" y="45242"/>
+                  </a:lnTo>
+                  <a:lnTo>
+                    <a:pt x="2363543" y="50114"/>
+                  </a:lnTo>
+                  <a:lnTo>
+                    <a:pt x="2291920" y="54955"/>
+                  </a:lnTo>
+                  <a:lnTo>
+                    <a:pt x="2220298" y="59767"/>
+                  </a:lnTo>
+                  <a:lnTo>
+                    <a:pt x="2148675" y="64548"/>
+                  </a:lnTo>
+                  <a:lnTo>
+                    <a:pt x="2077053" y="69299"/>
+                  </a:lnTo>
+                  <a:lnTo>
+                    <a:pt x="2005430" y="74021"/>
+                  </a:lnTo>
+                  <a:lnTo>
+                    <a:pt x="1933808" y="78714"/>
+                  </a:lnTo>
+                  <a:lnTo>
+                    <a:pt x="1862185" y="83377"/>
+                  </a:lnTo>
+                  <a:lnTo>
+                    <a:pt x="1790563" y="88011"/>
+                  </a:lnTo>
+                  <a:lnTo>
+                    <a:pt x="1718940" y="92617"/>
+                  </a:lnTo>
+                  <a:lnTo>
+                    <a:pt x="1647318" y="97193"/>
+                  </a:lnTo>
+                  <a:lnTo>
+                    <a:pt x="1575695" y="101742"/>
+                  </a:lnTo>
+                  <a:lnTo>
+                    <a:pt x="1504073" y="106261"/>
+                  </a:lnTo>
+                  <a:lnTo>
+                    <a:pt x="1432450" y="110753"/>
+                  </a:lnTo>
+                  <a:lnTo>
+                    <a:pt x="1360827" y="115217"/>
+                  </a:lnTo>
+                  <a:lnTo>
+                    <a:pt x="1289205" y="119653"/>
+                  </a:lnTo>
+                  <a:lnTo>
+                    <a:pt x="1217582" y="124061"/>
+                  </a:lnTo>
+                  <a:lnTo>
+                    <a:pt x="1145960" y="128442"/>
+                  </a:lnTo>
+                  <a:lnTo>
+                    <a:pt x="1074337" y="132796"/>
+                  </a:lnTo>
+                  <a:lnTo>
+                    <a:pt x="1002715" y="137122"/>
+                  </a:lnTo>
+                  <a:lnTo>
+                    <a:pt x="931092" y="141422"/>
+                  </a:lnTo>
+                  <a:lnTo>
+                    <a:pt x="859470" y="145695"/>
+                  </a:lnTo>
+                  <a:lnTo>
+                    <a:pt x="787847" y="149941"/>
+                  </a:lnTo>
+                  <a:lnTo>
+                    <a:pt x="716225" y="154160"/>
+                  </a:lnTo>
+                  <a:lnTo>
+                    <a:pt x="644602" y="158354"/>
+                  </a:lnTo>
+                  <a:lnTo>
+                    <a:pt x="572980" y="162521"/>
+                  </a:lnTo>
+                  <a:lnTo>
+                    <a:pt x="501357" y="166663"/>
+                  </a:lnTo>
+                  <a:lnTo>
+                    <a:pt x="429735" y="170778"/>
+                  </a:lnTo>
+                  <a:lnTo>
+                    <a:pt x="358112" y="174868"/>
+                  </a:lnTo>
+                  <a:lnTo>
+                    <a:pt x="286490" y="178933"/>
+                  </a:lnTo>
+                  <a:lnTo>
+                    <a:pt x="214867" y="182972"/>
+                  </a:lnTo>
+                  <a:lnTo>
+                    <a:pt x="143245" y="186986"/>
+                  </a:lnTo>
+                  <a:lnTo>
+                    <a:pt x="71622" y="190975"/>
+                  </a:lnTo>
+                  <a:lnTo>
+                    <a:pt x="0" y="194939"/>
                   </a:lnTo>
                 </a:path>
               </a:pathLst>
@@ -4217,312 +4217,312 @@
           </p:nvSpPr>
           <p:spPr>
             <a:xfrm>
-              <a:off x="1172049" y="3647209"/>
-              <a:ext cx="7090630" cy="1629673"/>
+              <a:off x="1172049" y="3623228"/>
+              <a:ext cx="7090630" cy="1653924"/>
             </a:xfrm>
             <a:custGeom>
               <a:avLst/>
               <a:pathLst>
-                <a:path w="7090630" h="1629673">
+                <a:path w="7090630" h="1653924">
                   <a:moveTo>
                     <a:pt x="0" y="0"/>
                   </a:moveTo>
                   <a:lnTo>
-                    <a:pt x="71622" y="36663"/>
-                  </a:lnTo>
-                  <a:lnTo>
-                    <a:pt x="143245" y="72622"/>
-                  </a:lnTo>
-                  <a:lnTo>
-                    <a:pt x="214867" y="107891"/>
-                  </a:lnTo>
-                  <a:lnTo>
-                    <a:pt x="286490" y="142484"/>
-                  </a:lnTo>
-                  <a:lnTo>
-                    <a:pt x="358112" y="176412"/>
-                  </a:lnTo>
-                  <a:lnTo>
-                    <a:pt x="429735" y="209689"/>
-                  </a:lnTo>
-                  <a:lnTo>
-                    <a:pt x="501357" y="242327"/>
-                  </a:lnTo>
-                  <a:lnTo>
-                    <a:pt x="572980" y="274339"/>
-                  </a:lnTo>
-                  <a:lnTo>
-                    <a:pt x="644602" y="305736"/>
-                  </a:lnTo>
-                  <a:lnTo>
-                    <a:pt x="716225" y="336531"/>
-                  </a:lnTo>
-                  <a:lnTo>
-                    <a:pt x="787847" y="366734"/>
-                  </a:lnTo>
-                  <a:lnTo>
-                    <a:pt x="859470" y="396358"/>
-                  </a:lnTo>
-                  <a:lnTo>
-                    <a:pt x="931092" y="425413"/>
-                  </a:lnTo>
-                  <a:lnTo>
-                    <a:pt x="1002715" y="453911"/>
-                  </a:lnTo>
-                  <a:lnTo>
-                    <a:pt x="1074337" y="481861"/>
-                  </a:lnTo>
-                  <a:lnTo>
-                    <a:pt x="1145960" y="509275"/>
-                  </a:lnTo>
-                  <a:lnTo>
-                    <a:pt x="1217582" y="536163"/>
-                  </a:lnTo>
-                  <a:lnTo>
-                    <a:pt x="1289205" y="562534"/>
-                  </a:lnTo>
-                  <a:lnTo>
-                    <a:pt x="1360827" y="588400"/>
-                  </a:lnTo>
-                  <a:lnTo>
-                    <a:pt x="1432450" y="613769"/>
-                  </a:lnTo>
-                  <a:lnTo>
-                    <a:pt x="1504073" y="638650"/>
-                  </a:lnTo>
-                  <a:lnTo>
-                    <a:pt x="1575695" y="663055"/>
-                  </a:lnTo>
-                  <a:lnTo>
-                    <a:pt x="1647318" y="686991"/>
-                  </a:lnTo>
-                  <a:lnTo>
-                    <a:pt x="1718940" y="710467"/>
-                  </a:lnTo>
-                  <a:lnTo>
-                    <a:pt x="1790563" y="733493"/>
-                  </a:lnTo>
-                  <a:lnTo>
-                    <a:pt x="1862185" y="756077"/>
-                  </a:lnTo>
-                  <a:lnTo>
-                    <a:pt x="1933808" y="778227"/>
-                  </a:lnTo>
-                  <a:lnTo>
-                    <a:pt x="2005430" y="799952"/>
-                  </a:lnTo>
-                  <a:lnTo>
-                    <a:pt x="2077053" y="821260"/>
-                  </a:lnTo>
-                  <a:lnTo>
-                    <a:pt x="2148675" y="842160"/>
-                  </a:lnTo>
-                  <a:lnTo>
-                    <a:pt x="2220298" y="862657"/>
-                  </a:lnTo>
-                  <a:lnTo>
-                    <a:pt x="2291920" y="882762"/>
-                  </a:lnTo>
-                  <a:lnTo>
-                    <a:pt x="2363543" y="902481"/>
-                  </a:lnTo>
-                  <a:lnTo>
-                    <a:pt x="2435165" y="921821"/>
-                  </a:lnTo>
-                  <a:lnTo>
-                    <a:pt x="2506788" y="940790"/>
-                  </a:lnTo>
-                  <a:lnTo>
-                    <a:pt x="2578410" y="959394"/>
-                  </a:lnTo>
-                  <a:lnTo>
-                    <a:pt x="2650033" y="977642"/>
-                  </a:lnTo>
-                  <a:lnTo>
-                    <a:pt x="2721655" y="995539"/>
-                  </a:lnTo>
-                  <a:lnTo>
-                    <a:pt x="2793278" y="1013093"/>
-                  </a:lnTo>
-                  <a:lnTo>
-                    <a:pt x="2864901" y="1030310"/>
-                  </a:lnTo>
-                  <a:lnTo>
-                    <a:pt x="2936523" y="1047197"/>
-                  </a:lnTo>
-                  <a:lnTo>
-                    <a:pt x="3008146" y="1063759"/>
-                  </a:lnTo>
-                  <a:lnTo>
-                    <a:pt x="3079768" y="1080003"/>
-                  </a:lnTo>
-                  <a:lnTo>
-                    <a:pt x="3151391" y="1095936"/>
-                  </a:lnTo>
-                  <a:lnTo>
-                    <a:pt x="3223013" y="1111563"/>
-                  </a:lnTo>
-                  <a:lnTo>
-                    <a:pt x="3294636" y="1126889"/>
-                  </a:lnTo>
-                  <a:lnTo>
-                    <a:pt x="3366258" y="1141922"/>
-                  </a:lnTo>
-                  <a:lnTo>
-                    <a:pt x="3437881" y="1156666"/>
-                  </a:lnTo>
-                  <a:lnTo>
-                    <a:pt x="3509503" y="1171127"/>
-                  </a:lnTo>
-                  <a:lnTo>
-                    <a:pt x="3581126" y="1185310"/>
-                  </a:lnTo>
-                  <a:lnTo>
-                    <a:pt x="3652748" y="1199222"/>
-                  </a:lnTo>
-                  <a:lnTo>
-                    <a:pt x="3724371" y="1212866"/>
-                  </a:lnTo>
-                  <a:lnTo>
-                    <a:pt x="3795993" y="1226248"/>
-                  </a:lnTo>
-                  <a:lnTo>
-                    <a:pt x="3867616" y="1239373"/>
-                  </a:lnTo>
-                  <a:lnTo>
-                    <a:pt x="3939238" y="1252247"/>
-                  </a:lnTo>
-                  <a:lnTo>
-                    <a:pt x="4010861" y="1264873"/>
-                  </a:lnTo>
-                  <a:lnTo>
-                    <a:pt x="4082483" y="1277257"/>
-                  </a:lnTo>
-                  <a:lnTo>
-                    <a:pt x="4154106" y="1289403"/>
-                  </a:lnTo>
-                  <a:lnTo>
-                    <a:pt x="4225729" y="1301317"/>
-                  </a:lnTo>
-                  <a:lnTo>
-                    <a:pt x="4297351" y="1313001"/>
-                  </a:lnTo>
-                  <a:lnTo>
-                    <a:pt x="4368974" y="1324461"/>
-                  </a:lnTo>
-                  <a:lnTo>
-                    <a:pt x="4440596" y="1335701"/>
-                  </a:lnTo>
-                  <a:lnTo>
-                    <a:pt x="4512219" y="1346726"/>
-                  </a:lnTo>
-                  <a:lnTo>
-                    <a:pt x="4583841" y="1357539"/>
-                  </a:lnTo>
-                  <a:lnTo>
-                    <a:pt x="4655464" y="1368144"/>
-                  </a:lnTo>
-                  <a:lnTo>
-                    <a:pt x="4727086" y="1378546"/>
-                  </a:lnTo>
-                  <a:lnTo>
-                    <a:pt x="4798709" y="1388748"/>
-                  </a:lnTo>
-                  <a:lnTo>
-                    <a:pt x="4870331" y="1398754"/>
-                  </a:lnTo>
-                  <a:lnTo>
-                    <a:pt x="4941954" y="1408568"/>
-                  </a:lnTo>
-                  <a:lnTo>
-                    <a:pt x="5013576" y="1418194"/>
-                  </a:lnTo>
-                  <a:lnTo>
-                    <a:pt x="5085199" y="1427635"/>
-                  </a:lnTo>
-                  <a:lnTo>
-                    <a:pt x="5156821" y="1436895"/>
-                  </a:lnTo>
-                  <a:lnTo>
-                    <a:pt x="5228444" y="1445977"/>
-                  </a:lnTo>
-                  <a:lnTo>
-                    <a:pt x="5300066" y="1454884"/>
-                  </a:lnTo>
-                  <a:lnTo>
-                    <a:pt x="5371689" y="1463621"/>
-                  </a:lnTo>
-                  <a:lnTo>
-                    <a:pt x="5443311" y="1472190"/>
-                  </a:lnTo>
-                  <a:lnTo>
-                    <a:pt x="5514934" y="1480595"/>
-                  </a:lnTo>
-                  <a:lnTo>
-                    <a:pt x="5586557" y="1488838"/>
-                  </a:lnTo>
-                  <a:lnTo>
-                    <a:pt x="5658179" y="1496923"/>
-                  </a:lnTo>
-                  <a:lnTo>
-                    <a:pt x="5729802" y="1504853"/>
-                  </a:lnTo>
-                  <a:lnTo>
-                    <a:pt x="5801424" y="1512630"/>
-                  </a:lnTo>
-                  <a:lnTo>
-                    <a:pt x="5873047" y="1520258"/>
-                  </a:lnTo>
-                  <a:lnTo>
-                    <a:pt x="5944669" y="1527740"/>
-                  </a:lnTo>
-                  <a:lnTo>
-                    <a:pt x="6016292" y="1535079"/>
-                  </a:lnTo>
-                  <a:lnTo>
-                    <a:pt x="6087914" y="1542276"/>
-                  </a:lnTo>
-                  <a:lnTo>
-                    <a:pt x="6159537" y="1549335"/>
-                  </a:lnTo>
-                  <a:lnTo>
-                    <a:pt x="6231159" y="1556259"/>
-                  </a:lnTo>
-                  <a:lnTo>
-                    <a:pt x="6302782" y="1563050"/>
-                  </a:lnTo>
-                  <a:lnTo>
-                    <a:pt x="6374404" y="1569710"/>
-                  </a:lnTo>
-                  <a:lnTo>
-                    <a:pt x="6446027" y="1576243"/>
-                  </a:lnTo>
-                  <a:lnTo>
-                    <a:pt x="6517649" y="1582650"/>
-                  </a:lnTo>
-                  <a:lnTo>
-                    <a:pt x="6589272" y="1588934"/>
-                  </a:lnTo>
-                  <a:lnTo>
-                    <a:pt x="6660894" y="1595098"/>
-                  </a:lnTo>
-                  <a:lnTo>
-                    <a:pt x="6732517" y="1601143"/>
-                  </a:lnTo>
-                  <a:lnTo>
-                    <a:pt x="6804139" y="1607073"/>
-                  </a:lnTo>
-                  <a:lnTo>
-                    <a:pt x="6875762" y="1612888"/>
-                  </a:lnTo>
-                  <a:lnTo>
-                    <a:pt x="6947385" y="1618592"/>
-                  </a:lnTo>
-                  <a:lnTo>
-                    <a:pt x="7019007" y="1624186"/>
-                  </a:lnTo>
-                  <a:lnTo>
-                    <a:pt x="7090630" y="1629673"/>
+                    <a:pt x="71622" y="37381"/>
+                  </a:lnTo>
+                  <a:lnTo>
+                    <a:pt x="143245" y="74039"/>
+                  </a:lnTo>
+                  <a:lnTo>
+                    <a:pt x="214867" y="109989"/>
+                  </a:lnTo>
+                  <a:lnTo>
+                    <a:pt x="286490" y="145244"/>
+                  </a:lnTo>
+                  <a:lnTo>
+                    <a:pt x="358112" y="179818"/>
+                  </a:lnTo>
+                  <a:lnTo>
+                    <a:pt x="429735" y="213723"/>
+                  </a:lnTo>
+                  <a:lnTo>
+                    <a:pt x="501357" y="246973"/>
+                  </a:lnTo>
+                  <a:lnTo>
+                    <a:pt x="572980" y="279581"/>
+                  </a:lnTo>
+                  <a:lnTo>
+                    <a:pt x="644602" y="311558"/>
+                  </a:lnTo>
+                  <a:lnTo>
+                    <a:pt x="716225" y="342917"/>
+                  </a:lnTo>
+                  <a:lnTo>
+                    <a:pt x="787847" y="373670"/>
+                  </a:lnTo>
+                  <a:lnTo>
+                    <a:pt x="859470" y="403829"/>
+                  </a:lnTo>
+                  <a:lnTo>
+                    <a:pt x="931092" y="433405"/>
+                  </a:lnTo>
+                  <a:lnTo>
+                    <a:pt x="1002715" y="462409"/>
+                  </a:lnTo>
+                  <a:lnTo>
+                    <a:pt x="1074337" y="490852"/>
+                  </a:lnTo>
+                  <a:lnTo>
+                    <a:pt x="1145960" y="518746"/>
+                  </a:lnTo>
+                  <a:lnTo>
+                    <a:pt x="1217582" y="546101"/>
+                  </a:lnTo>
+                  <a:lnTo>
+                    <a:pt x="1289205" y="572927"/>
+                  </a:lnTo>
+                  <a:lnTo>
+                    <a:pt x="1360827" y="599234"/>
+                  </a:lnTo>
+                  <a:lnTo>
+                    <a:pt x="1432450" y="625033"/>
+                  </a:lnTo>
+                  <a:lnTo>
+                    <a:pt x="1504073" y="650333"/>
+                  </a:lnTo>
+                  <a:lnTo>
+                    <a:pt x="1575695" y="675145"/>
+                  </a:lnTo>
+                  <a:lnTo>
+                    <a:pt x="1647318" y="699476"/>
+                  </a:lnTo>
+                  <a:lnTo>
+                    <a:pt x="1718940" y="723338"/>
+                  </a:lnTo>
+                  <a:lnTo>
+                    <a:pt x="1790563" y="746738"/>
+                  </a:lnTo>
+                  <a:lnTo>
+                    <a:pt x="1862185" y="769686"/>
+                  </a:lnTo>
+                  <a:lnTo>
+                    <a:pt x="1933808" y="792190"/>
+                  </a:lnTo>
+                  <a:lnTo>
+                    <a:pt x="2005430" y="814260"/>
+                  </a:lnTo>
+                  <a:lnTo>
+                    <a:pt x="2077053" y="835903"/>
+                  </a:lnTo>
+                  <a:lnTo>
+                    <a:pt x="2148675" y="857127"/>
+                  </a:lnTo>
+                  <a:lnTo>
+                    <a:pt x="2220298" y="877942"/>
+                  </a:lnTo>
+                  <a:lnTo>
+                    <a:pt x="2291920" y="898354"/>
+                  </a:lnTo>
+                  <a:lnTo>
+                    <a:pt x="2363543" y="918371"/>
+                  </a:lnTo>
+                  <a:lnTo>
+                    <a:pt x="2435165" y="938002"/>
+                  </a:lnTo>
+                  <a:lnTo>
+                    <a:pt x="2506788" y="957253"/>
+                  </a:lnTo>
+                  <a:lnTo>
+                    <a:pt x="2578410" y="976132"/>
+                  </a:lnTo>
+                  <a:lnTo>
+                    <a:pt x="2650033" y="994646"/>
+                  </a:lnTo>
+                  <a:lnTo>
+                    <a:pt x="2721655" y="1012803"/>
+                  </a:lnTo>
+                  <a:lnTo>
+                    <a:pt x="2793278" y="1030608"/>
+                  </a:lnTo>
+                  <a:lnTo>
+                    <a:pt x="2864901" y="1048069"/>
+                  </a:lnTo>
+                  <a:lnTo>
+                    <a:pt x="2936523" y="1065193"/>
+                  </a:lnTo>
+                  <a:lnTo>
+                    <a:pt x="3008146" y="1081986"/>
+                  </a:lnTo>
+                  <a:lnTo>
+                    <a:pt x="3079768" y="1098454"/>
+                  </a:lnTo>
+                  <a:lnTo>
+                    <a:pt x="3151391" y="1114604"/>
+                  </a:lnTo>
+                  <a:lnTo>
+                    <a:pt x="3223013" y="1130442"/>
+                  </a:lnTo>
+                  <a:lnTo>
+                    <a:pt x="3294636" y="1145974"/>
+                  </a:lnTo>
+                  <a:lnTo>
+                    <a:pt x="3366258" y="1161205"/>
+                  </a:lnTo>
+                  <a:lnTo>
+                    <a:pt x="3437881" y="1176142"/>
+                  </a:lnTo>
+                  <a:lnTo>
+                    <a:pt x="3509503" y="1190791"/>
+                  </a:lnTo>
+                  <a:lnTo>
+                    <a:pt x="3581126" y="1205156"/>
+                  </a:lnTo>
+                  <a:lnTo>
+                    <a:pt x="3652748" y="1219243"/>
+                  </a:lnTo>
+                  <a:lnTo>
+                    <a:pt x="3724371" y="1233059"/>
+                  </a:lnTo>
+                  <a:lnTo>
+                    <a:pt x="3795993" y="1246607"/>
+                  </a:lnTo>
+                  <a:lnTo>
+                    <a:pt x="3867616" y="1259893"/>
+                  </a:lnTo>
+                  <a:lnTo>
+                    <a:pt x="3939238" y="1272923"/>
+                  </a:lnTo>
+                  <a:lnTo>
+                    <a:pt x="4010861" y="1285701"/>
+                  </a:lnTo>
+                  <a:lnTo>
+                    <a:pt x="4082483" y="1298232"/>
+                  </a:lnTo>
+                  <a:lnTo>
+                    <a:pt x="4154106" y="1310520"/>
+                  </a:lnTo>
+                  <a:lnTo>
+                    <a:pt x="4225729" y="1322571"/>
+                  </a:lnTo>
+                  <a:lnTo>
+                    <a:pt x="4297351" y="1334390"/>
+                  </a:lnTo>
+                  <a:lnTo>
+                    <a:pt x="4368974" y="1345979"/>
+                  </a:lnTo>
+                  <a:lnTo>
+                    <a:pt x="4440596" y="1357345"/>
+                  </a:lnTo>
+                  <a:lnTo>
+                    <a:pt x="4512219" y="1368491"/>
+                  </a:lnTo>
+                  <a:lnTo>
+                    <a:pt x="4583841" y="1379422"/>
+                  </a:lnTo>
+                  <a:lnTo>
+                    <a:pt x="4655464" y="1390141"/>
+                  </a:lnTo>
+                  <a:lnTo>
+                    <a:pt x="4727086" y="1400653"/>
+                  </a:lnTo>
+                  <a:lnTo>
+                    <a:pt x="4798709" y="1410962"/>
+                  </a:lnTo>
+                  <a:lnTo>
+                    <a:pt x="4870331" y="1421072"/>
+                  </a:lnTo>
+                  <a:lnTo>
+                    <a:pt x="4941954" y="1430986"/>
+                  </a:lnTo>
+                  <a:lnTo>
+                    <a:pt x="5013576" y="1440709"/>
+                  </a:lnTo>
+                  <a:lnTo>
+                    <a:pt x="5085199" y="1450244"/>
+                  </a:lnTo>
+                  <a:lnTo>
+                    <a:pt x="5156821" y="1459595"/>
+                  </a:lnTo>
+                  <a:lnTo>
+                    <a:pt x="5228444" y="1468764"/>
+                  </a:lnTo>
+                  <a:lnTo>
+                    <a:pt x="5300066" y="1477757"/>
+                  </a:lnTo>
+                  <a:lnTo>
+                    <a:pt x="5371689" y="1486576"/>
+                  </a:lnTo>
+                  <a:lnTo>
+                    <a:pt x="5443311" y="1495224"/>
+                  </a:lnTo>
+                  <a:lnTo>
+                    <a:pt x="5514934" y="1503705"/>
+                  </a:lnTo>
+                  <a:lnTo>
+                    <a:pt x="5586557" y="1512022"/>
+                  </a:lnTo>
+                  <a:lnTo>
+                    <a:pt x="5658179" y="1520179"/>
+                  </a:lnTo>
+                  <a:lnTo>
+                    <a:pt x="5729802" y="1528177"/>
+                  </a:lnTo>
+                  <a:lnTo>
+                    <a:pt x="5801424" y="1536022"/>
+                  </a:lnTo>
+                  <a:lnTo>
+                    <a:pt x="5873047" y="1543714"/>
+                  </a:lnTo>
+                  <a:lnTo>
+                    <a:pt x="5944669" y="1551258"/>
+                  </a:lnTo>
+                  <a:lnTo>
+                    <a:pt x="6016292" y="1558656"/>
+                  </a:lnTo>
+                  <a:lnTo>
+                    <a:pt x="6087914" y="1565911"/>
+                  </a:lnTo>
+                  <a:lnTo>
+                    <a:pt x="6159537" y="1573026"/>
+                  </a:lnTo>
+                  <a:lnTo>
+                    <a:pt x="6231159" y="1580004"/>
+                  </a:lnTo>
+                  <a:lnTo>
+                    <a:pt x="6302782" y="1586846"/>
+                  </a:lnTo>
+                  <a:lnTo>
+                    <a:pt x="6374404" y="1593556"/>
+                  </a:lnTo>
+                  <a:lnTo>
+                    <a:pt x="6446027" y="1600137"/>
+                  </a:lnTo>
+                  <a:lnTo>
+                    <a:pt x="6517649" y="1606590"/>
+                  </a:lnTo>
+                  <a:lnTo>
+                    <a:pt x="6589272" y="1612919"/>
+                  </a:lnTo>
+                  <a:lnTo>
+                    <a:pt x="6660894" y="1619125"/>
+                  </a:lnTo>
+                  <a:lnTo>
+                    <a:pt x="6732517" y="1625212"/>
+                  </a:lnTo>
+                  <a:lnTo>
+                    <a:pt x="6804139" y="1631180"/>
+                  </a:lnTo>
+                  <a:lnTo>
+                    <a:pt x="6875762" y="1637034"/>
+                  </a:lnTo>
+                  <a:lnTo>
+                    <a:pt x="6947385" y="1642774"/>
+                  </a:lnTo>
+                  <a:lnTo>
+                    <a:pt x="7019007" y="1648403"/>
+                  </a:lnTo>
+                  <a:lnTo>
+                    <a:pt x="7090630" y="1653924"/>
                   </a:lnTo>
                 </a:path>
               </a:pathLst>
@@ -4594,7 +4594,7 @@
           </p:nvSpPr>
           <p:spPr>
             <a:xfrm>
-              <a:off x="4254372" y="2073503"/>
+              <a:off x="4278722" y="2073503"/>
               <a:ext cx="0" cy="3649639"/>
             </a:xfrm>
             <a:custGeom>
@@ -4867,7 +4867,7 @@
           </p:nvSpPr>
           <p:spPr>
             <a:xfrm>
-              <a:off x="2254916" y="5785772"/>
+              <a:off x="2255364" y="5785772"/>
               <a:ext cx="161574" cy="80101"/>
             </a:xfrm>
             <a:prstGeom prst="rect">
@@ -4913,7 +4913,7 @@
           </p:nvSpPr>
           <p:spPr>
             <a:xfrm>
-              <a:off x="4120281" y="5785772"/>
+              <a:off x="4120286" y="5785772"/>
               <a:ext cx="62179" cy="80101"/>
             </a:xfrm>
             <a:prstGeom prst="rect">
@@ -4959,7 +4959,7 @@
           </p:nvSpPr>
           <p:spPr>
             <a:xfrm>
-              <a:off x="5904858" y="5785772"/>
+              <a:off x="5904422" y="5785772"/>
               <a:ext cx="124358" cy="80101"/>
             </a:xfrm>
             <a:prstGeom prst="rect">
@@ -5005,7 +5005,7 @@
           </p:nvSpPr>
           <p:spPr>
             <a:xfrm>
-              <a:off x="7720525" y="5785772"/>
+              <a:off x="7719647" y="5785772"/>
               <a:ext cx="124358" cy="80101"/>
             </a:xfrm>
             <a:prstGeom prst="rect">
@@ -5176,7 +5176,7 @@
                   <a:latin typeface="Helvetica"/>
                   <a:cs typeface="Helvetica"/>
                 </a:rPr>
-                <a:t>subHR per 10 % decline: 1.28 (0.92-1.77), p_Bonf = 0.838 (n = 6)  |  per IQR decline (Δ = 26.4 %): 1.92 (0.81-4.54)  |  IQR: [-11.1, 15.3] %</a:t>
+                <a:t>subHR per 10 % decline: 1.28 (0.92-1.78), p_Bonf = 0.826 (n = 6)  |  per IQR decline (Δ = 26.4 %): 1.92 (0.81-4.55)  |  IQR: [-11.1, 15.4] %</a:t>
               </a:r>
             </a:p>
           </p:txBody>
